--- a/chapters/pptx/part05/第15讲-Agent Runtime 的混合架构选型与.pptx
+++ b/chapters/pptx/part05/第15讲-Agent Runtime 的混合架构选型与.pptx
@@ -10,6 +10,8 @@
     <p:sldId id="258" r:id="rId9"/>
     <p:sldId id="259" r:id="rId10"/>
     <p:sldId id="260" r:id="rId11"/>
+    <p:sldId id="261" r:id="rId12"/>
+    <p:sldId id="262" r:id="rId13"/>
   </p:sldIdLst>
   <p:sldSz cx="12192000" cy="6858000" type="screen4x3"/>
   <p:notesSz cx="6858000" cy="9144000"/>
@@ -3136,7 +3138,7 @@
             <a:avLst/>
           </a:prstGeom>
           <a:solidFill>
-            <a:srgbClr val="003366"/>
+            <a:srgbClr val="0E7490"/>
           </a:solidFill>
           <a:ln>
             <a:noFill/>
@@ -3234,13 +3236,13 @@
             <a:r>
               <a:rPr lang="zh-CN" sz="4200" b="1" dirty="0">
                 <a:solidFill>
-                  <a:srgbClr val="003366"/>
+                  <a:srgbClr val="0E7490"/>
                 </a:solidFill>
                 <a:latin typeface="Arial"/>
                 <a:ea typeface="Microsoft YaHei"/>
                 <a:cs typeface="Arial"/>
               </a:rPr>
-              <a:t>15 Agent Runtime 的混合架构选型与设</a:t>
+              <a:t>Agent Runtime 的混合架构选型与设计</a:t>
             </a:r>
           </a:p>
         </p:txBody>
@@ -3280,7 +3282,7 @@
                 <a:ea typeface="Microsoft YaHei"/>
                 <a:cs typeface="Arial"/>
               </a:rPr>
-              <a:t>第五篇（Agent Harness 与 Runtime 工程</a:t>
+              <a:t>Agent Runtime · 教学讲义</a:t>
             </a:r>
           </a:p>
         </p:txBody>
@@ -3316,7 +3318,7 @@
           <a:noFill/>
           <a:ln w="19050">
             <a:solidFill>
-              <a:srgbClr val="0066CC"/>
+              <a:srgbClr val="06B6D4"/>
             </a:solidFill>
           </a:ln>
         </p:spPr>
@@ -3336,7 +3338,7 @@
             <a:avLst/>
           </a:prstGeom>
           <a:solidFill>
-            <a:srgbClr val="0066CC"/>
+            <a:srgbClr val="06B6D4"/>
           </a:solidFill>
           <a:ln>
             <a:noFill/>
@@ -3478,7 +3480,7 @@
             <a:avLst/>
           </a:prstGeom>
           <a:solidFill>
-            <a:srgbClr val="F5F7FA"/>
+            <a:srgbClr val="F0F9FC"/>
           </a:solidFill>
           <a:ln>
             <a:noFill/>
@@ -3565,7 +3567,7 @@
             <a:avLst/>
           </a:prstGeom>
           <a:solidFill>
-            <a:srgbClr val="FFFFFF"/>
+            <a:srgbClr val="0E7490"/>
           </a:solidFill>
           <a:ln>
             <a:noFill/>
@@ -3574,20 +3576,334 @@
       </p:sp>
       <p:sp>
         <p:nvSpPr>
-          <p:cNvPr id="3" name="Rectangle 3"/>
+          <p:cNvPr id="3" name="Freeform 3"/>
           <p:cNvSpPr/>
           <p:nvPr/>
         </p:nvSpPr>
         <p:spPr>
           <a:xfrm>
-            <a:off x="0" y="0"/>
-            <a:ext cx="12192000" cy="666750"/>
+            <a:off x="5715000" y="0"/>
+            <a:ext cx="6477000" cy="6858000"/>
+          </a:xfrm>
+          <a:custGeom>
+            <a:avLst/>
+            <a:gdLst/>
+            <a:ahLst/>
+            <a:cxnLst/>
+            <a:rect l="l" t="t" r="r" b="b"/>
+            <a:pathLst>
+              <a:path w="6477000" h="6858000">
+                <a:moveTo>
+                  <a:pt x="1905000" y="0"/>
+                </a:moveTo>
+                <a:lnTo>
+                  <a:pt x="6477000" y="0"/>
+                </a:lnTo>
+                <a:lnTo>
+                  <a:pt x="6477000" y="6858000"/>
+                </a:lnTo>
+                <a:lnTo>
+                  <a:pt x="0" y="6858000"/>
+                </a:lnTo>
+                <a:close/>
+              </a:path>
+            </a:pathLst>
+          </a:custGeom>
+          <a:solidFill>
+            <a:srgbClr val="06B6D4">
+              <a:alpha val="20000"/>
+            </a:srgbClr>
+          </a:solidFill>
+          <a:ln>
+            <a:noFill/>
+          </a:ln>
+        </p:spPr>
+      </p:sp>
+      <p:sp>
+        <p:nvSpPr>
+          <p:cNvPr id="4" name="Rectangle 4"/>
+          <p:cNvSpPr/>
+          <p:nvPr/>
+        </p:nvSpPr>
+        <p:spPr>
+          <a:xfrm>
+            <a:off x="0" y="2286000"/>
+            <a:ext cx="114300" cy="2286000"/>
           </a:xfrm>
           <a:prstGeom prst="rect">
             <a:avLst/>
           </a:prstGeom>
           <a:solidFill>
-            <a:srgbClr val="003366"/>
+            <a:srgbClr val="CC0000"/>
+          </a:solidFill>
+          <a:ln>
+            <a:noFill/>
+          </a:ln>
+        </p:spPr>
+      </p:sp>
+      <p:sp>
+        <p:nvSpPr>
+          <p:cNvPr id="5" name="TextBox 5"/>
+          <p:cNvSpPr txBox="1"/>
+          <p:nvPr/>
+        </p:nvSpPr>
+        <p:spPr>
+          <a:xfrm>
+            <a:off x="476250" y="2095500"/>
+            <a:ext cx="2952750" cy="3143250"/>
+          </a:xfrm>
+          <a:prstGeom prst="rect">
+            <a:avLst/>
+          </a:prstGeom>
+          <a:noFill/>
+          <a:ln>
+            <a:noFill/>
+          </a:ln>
+        </p:spPr>
+        <p:txBody>
+          <a:bodyPr wrap="square" lIns="0" tIns="0" rIns="0" bIns="0" anchor="ctr" anchorCtr="0">
+            <a:normAutofit/>
+          </a:bodyPr>
+          <a:lstStyle/>
+          <a:p>
+            <a:pPr algn="ctr"/>
+            <a:r>
+              <a:rPr lang="zh-CN" sz="18750" b="1" dirty="0">
+                <a:solidFill>
+                  <a:srgbClr val="FFFFFF">
+                    <a:alphaMod val="10000"/>
+                  </a:srgbClr>
+                </a:solidFill>
+                <a:latin typeface="Arial"/>
+                <a:ea typeface="Microsoft YaHei"/>
+                <a:cs typeface="Arial"/>
+              </a:rPr>
+              <a:t>15</a:t>
+            </a:r>
+          </a:p>
+        </p:txBody>
+      </p:sp>
+      <p:sp>
+        <p:nvSpPr>
+          <p:cNvPr id="6" name="Line 6"/>
+          <p:cNvSpPr/>
+          <p:nvPr/>
+        </p:nvSpPr>
+        <p:spPr>
+          <a:xfrm>
+            <a:off x="3619500" y="2505075"/>
+            <a:ext cx="1143000" cy="9525"/>
+          </a:xfrm>
+          <a:custGeom>
+            <a:avLst/>
+            <a:gdLst/>
+            <a:ahLst/>
+            <a:cxnLst/>
+            <a:rect l="l" t="t" r="r" b="b"/>
+            <a:pathLst>
+              <a:path w="1143000" h="9525">
+                <a:moveTo>
+                  <a:pt x="0" y="0"/>
+                </a:moveTo>
+                <a:lnTo>
+                  <a:pt x="1143000" y="0"/>
+                </a:lnTo>
+              </a:path>
+            </a:pathLst>
+          </a:custGeom>
+          <a:noFill/>
+          <a:ln w="57150">
+            <a:solidFill>
+              <a:srgbClr val="CC0000"/>
+            </a:solidFill>
+          </a:ln>
+        </p:spPr>
+      </p:sp>
+      <p:sp>
+        <p:nvSpPr>
+          <p:cNvPr id="7" name="TextBox 7"/>
+          <p:cNvSpPr txBox="1"/>
+          <p:nvPr/>
+        </p:nvSpPr>
+        <p:spPr>
+          <a:xfrm>
+            <a:off x="3619500" y="2667000"/>
+            <a:ext cx="7429500" cy="876300"/>
+          </a:xfrm>
+          <a:prstGeom prst="rect">
+            <a:avLst/>
+          </a:prstGeom>
+          <a:noFill/>
+          <a:ln>
+            <a:noFill/>
+          </a:ln>
+        </p:spPr>
+        <p:txBody>
+          <a:bodyPr wrap="square" lIns="0" tIns="0" rIns="0" bIns="0" anchor="ctr" anchorCtr="0">
+            <a:normAutofit/>
+          </a:bodyPr>
+          <a:lstStyle/>
+          <a:p>
+            <a:pPr algn="l"/>
+            <a:r>
+              <a:rPr lang="zh-CN" sz="4200" b="1" dirty="0">
+                <a:solidFill>
+                  <a:srgbClr val="FFFFFF"/>
+                </a:solidFill>
+                <a:latin typeface="Arial"/>
+                <a:ea typeface="Microsoft YaHei"/>
+                <a:cs typeface="Arial"/>
+              </a:rPr>
+              <a:t>学习目标 / Lernziele</a:t>
+            </a:r>
+          </a:p>
+        </p:txBody>
+      </p:sp>
+      <p:sp>
+        <p:nvSpPr>
+          <p:cNvPr id="8" name="TextBox 8"/>
+          <p:cNvSpPr txBox="1"/>
+          <p:nvPr/>
+        </p:nvSpPr>
+        <p:spPr>
+          <a:xfrm>
+            <a:off x="3619500" y="3648075"/>
+            <a:ext cx="7620000" cy="419100"/>
+          </a:xfrm>
+          <a:prstGeom prst="rect">
+            <a:avLst/>
+          </a:prstGeom>
+          <a:noFill/>
+          <a:ln>
+            <a:noFill/>
+          </a:ln>
+        </p:spPr>
+        <p:txBody>
+          <a:bodyPr wrap="square" lIns="0" tIns="0" rIns="0" bIns="0" anchor="ctr" anchorCtr="0">
+            <a:normAutofit/>
+          </a:bodyPr>
+          <a:lstStyle/>
+          <a:p>
+            <a:pPr algn="l"/>
+            <a:r>
+              <a:rPr lang="zh-CN" sz="1800" dirty="0">
+                <a:solidFill>
+                  <a:srgbClr val="E8F4FC"/>
+                </a:solidFill>
+                <a:latin typeface="Arial"/>
+                <a:ea typeface="Microsoft YaHei"/>
+                <a:cs typeface="Arial"/>
+              </a:rPr>
+              <a:t>1) 能解释单 Loop的机制；2) 能对比固定的取舍；3) 能跑通 workflow.py 对应测试</a:t>
+            </a:r>
+          </a:p>
+        </p:txBody>
+      </p:sp>
+      <p:sp>
+        <p:nvSpPr>
+          <p:cNvPr id="9" name="TextBox 9"/>
+          <p:cNvSpPr txBox="1"/>
+          <p:nvPr/>
+        </p:nvSpPr>
+        <p:spPr>
+          <a:xfrm>
+            <a:off x="6762750" y="6286500"/>
+            <a:ext cx="4095750" cy="285750"/>
+          </a:xfrm>
+          <a:prstGeom prst="rect">
+            <a:avLst/>
+          </a:prstGeom>
+          <a:noFill/>
+          <a:ln>
+            <a:noFill/>
+          </a:ln>
+        </p:spPr>
+        <p:txBody>
+          <a:bodyPr wrap="square" lIns="0" tIns="0" rIns="0" bIns="0" anchor="ctr" anchorCtr="0">
+            <a:normAutofit/>
+          </a:bodyPr>
+          <a:lstStyle/>
+          <a:p>
+            <a:pPr algn="r"/>
+            <a:r>
+              <a:rPr lang="zh-CN" sz="1200" dirty="0">
+                <a:solidFill>
+                  <a:srgbClr val="FFFFFF">
+                    <a:alphaMod val="55000"/>
+                  </a:srgbClr>
+                </a:solidFill>
+                <a:latin typeface="Arial"/>
+                <a:ea typeface="Microsoft YaHei"/>
+                <a:cs typeface="Arial"/>
+              </a:rPr>
+              <a:t>Agent Runtime 的混合架构选型与</a:t>
+            </a:r>
+          </a:p>
+        </p:txBody>
+      </p:sp>
+    </p:spTree>
+  </p:cSld>
+  <p:clrMapOvr>
+    <a:masterClrMapping/>
+  </p:clrMapOvr>
+</p:sld>
+</file>
+
+<file path=ppt/slides/slide3.xml><?xml version="1.0" encoding="utf-8"?>
+<p:sld xmlns:a="http://schemas.openxmlformats.org/drawingml/2006/main" xmlns:r="http://schemas.openxmlformats.org/officeDocument/2006/relationships" xmlns:p="http://schemas.openxmlformats.org/presentationml/2006/main">
+  <p:cSld>
+    <p:spTree>
+      <p:nvGrpSpPr>
+        <p:cNvPr id="1" name=""/>
+        <p:cNvGrpSpPr/>
+        <p:nvPr/>
+      </p:nvGrpSpPr>
+      <p:grpSpPr>
+        <a:xfrm>
+          <a:off x="0" y="0"/>
+          <a:ext cx="0" cy="0"/>
+          <a:chOff x="0" y="0"/>
+          <a:chExt cx="0" cy="0"/>
+        </a:xfrm>
+      </p:grpSpPr>
+      <p:sp>
+        <p:nvSpPr>
+          <p:cNvPr id="2" name="Rectangle 2"/>
+          <p:cNvSpPr/>
+          <p:nvPr/>
+        </p:nvSpPr>
+        <p:spPr>
+          <a:xfrm>
+            <a:off x="0" y="0"/>
+            <a:ext cx="12192000" cy="6858000"/>
+          </a:xfrm>
+          <a:prstGeom prst="rect">
+            <a:avLst/>
+          </a:prstGeom>
+          <a:solidFill>
+            <a:srgbClr val="FFFFFF"/>
+          </a:solidFill>
+          <a:ln>
+            <a:noFill/>
+          </a:ln>
+        </p:spPr>
+      </p:sp>
+      <p:sp>
+        <p:nvSpPr>
+          <p:cNvPr id="3" name="Rectangle 3"/>
+          <p:cNvSpPr/>
+          <p:nvPr/>
+        </p:nvSpPr>
+        <p:spPr>
+          <a:xfrm>
+            <a:off x="0" y="0"/>
+            <a:ext cx="12192000" cy="666750"/>
+          </a:xfrm>
+          <a:prstGeom prst="rect">
+            <a:avLst/>
+          </a:prstGeom>
+          <a:solidFill>
+            <a:srgbClr val="0E7490"/>
           </a:solidFill>
           <a:ln>
             <a:noFill/>
@@ -3773,7 +4089,7 @@
             <a:avLst/>
           </a:prstGeom>
           <a:solidFill>
-            <a:srgbClr val="0066CC"/>
+            <a:srgbClr val="06B6D4"/>
           </a:solidFill>
           <a:ln>
             <a:noFill/>
@@ -3971,7 +4287,7 @@
                 <a:ea typeface="Microsoft YaHei"/>
                 <a:cs typeface="Arial"/>
               </a:rPr>
-              <a:t>02</a:t>
+              <a:t>03</a:t>
             </a:r>
           </a:p>
         </p:txBody>
@@ -4033,7 +4349,7 @@
               </a:avLst>
             </a:prstGeom>
             <a:solidFill>
-              <a:srgbClr val="0066CC"/>
+              <a:srgbClr val="06B6D4"/>
             </a:solidFill>
             <a:ln>
               <a:noFill/>
@@ -4069,7 +4385,7 @@
               <a:r>
                 <a:rPr lang="zh-CN" sz="1650" b="1" dirty="0">
                   <a:solidFill>
-                    <a:srgbClr val="0066CC"/>
+                    <a:srgbClr val="06B6D4"/>
                   </a:solidFill>
                   <a:latin typeface="Arial"/>
                   <a:ea typeface="Microsoft YaHei"/>
@@ -4109,7 +4425,7 @@
               <a:r>
                 <a:rPr lang="zh-CN" sz="1575" b="1" dirty="0">
                   <a:solidFill>
-                    <a:srgbClr val="003366"/>
+                    <a:srgbClr val="0E7490"/>
                   </a:solidFill>
                   <a:latin typeface="Arial"/>
                   <a:ea typeface="Microsoft YaHei"/>
@@ -4254,7 +4570,7 @@
               </a:avLst>
             </a:prstGeom>
             <a:solidFill>
-              <a:srgbClr val="0066CC"/>
+              <a:srgbClr val="06B6D4"/>
             </a:solidFill>
             <a:ln>
               <a:noFill/>
@@ -4290,7 +4606,7 @@
               <a:r>
                 <a:rPr lang="zh-CN" sz="1650" b="1" dirty="0">
                   <a:solidFill>
-                    <a:srgbClr val="0066CC"/>
+                    <a:srgbClr val="06B6D4"/>
                   </a:solidFill>
                   <a:latin typeface="Arial"/>
                   <a:ea typeface="Microsoft YaHei"/>
@@ -4330,13 +4646,13 @@
               <a:r>
                 <a:rPr lang="zh-CN" sz="1575" b="1" dirty="0">
                   <a:solidFill>
-                    <a:srgbClr val="003366"/>
+                    <a:srgbClr val="0E7490"/>
                   </a:solidFill>
                   <a:latin typeface="Arial"/>
                   <a:ea typeface="Microsoft YaHei"/>
                   <a:cs typeface="Arial"/>
                 </a:rPr>
-                <a:t>固定 Workflow</a:t>
+                <a:t>固定</a:t>
               </a:r>
             </a:p>
           </p:txBody>
@@ -4449,7 +4765,7 @@
               </a:avLst>
             </a:prstGeom>
             <a:solidFill>
-              <a:srgbClr val="F5F7FA"/>
+              <a:srgbClr val="F0F9FC"/>
             </a:solidFill>
             <a:ln w="11430">
               <a:solidFill>
@@ -4475,7 +4791,7 @@
               </a:avLst>
             </a:prstGeom>
             <a:solidFill>
-              <a:srgbClr val="0066CC"/>
+              <a:srgbClr val="06B6D4"/>
             </a:solidFill>
             <a:ln>
               <a:noFill/>
@@ -4511,7 +4827,7 @@
               <a:r>
                 <a:rPr lang="zh-CN" sz="3150" b="1" dirty="0">
                   <a:solidFill>
-                    <a:srgbClr val="003366"/>
+                    <a:srgbClr val="0E7490"/>
                   </a:solidFill>
                   <a:latin typeface="Arial"/>
                   <a:ea typeface="Microsoft YaHei"/>
@@ -4630,7 +4946,7 @@
               </a:avLst>
             </a:prstGeom>
             <a:solidFill>
-              <a:srgbClr val="F5F7FA"/>
+              <a:srgbClr val="F0F9FC"/>
             </a:solidFill>
             <a:ln w="11430">
               <a:solidFill>
@@ -4656,7 +4972,7 @@
               </a:avLst>
             </a:prstGeom>
             <a:solidFill>
-              <a:srgbClr val="0066CC"/>
+              <a:srgbClr val="06B6D4"/>
             </a:solidFill>
             <a:ln>
               <a:noFill/>
@@ -4692,7 +5008,7 @@
               <a:r>
                 <a:rPr lang="zh-CN" sz="3150" b="1" dirty="0">
                   <a:solidFill>
-                    <a:srgbClr val="003366"/>
+                    <a:srgbClr val="0E7490"/>
                   </a:solidFill>
                   <a:latin typeface="Arial"/>
                   <a:ea typeface="Microsoft YaHei"/>
@@ -4811,7 +5127,7 @@
               </a:avLst>
             </a:prstGeom>
             <a:solidFill>
-              <a:srgbClr val="F5F7FA"/>
+              <a:srgbClr val="F0F9FC"/>
             </a:solidFill>
             <a:ln w="11430">
               <a:solidFill>
@@ -4837,7 +5153,7 @@
               </a:avLst>
             </a:prstGeom>
             <a:solidFill>
-              <a:srgbClr val="0066CC"/>
+              <a:srgbClr val="06B6D4"/>
             </a:solidFill>
             <a:ln>
               <a:noFill/>
@@ -4873,7 +5189,7 @@
               <a:r>
                 <a:rPr lang="zh-CN" sz="3150" b="1" dirty="0">
                   <a:solidFill>
-                    <a:srgbClr val="003366"/>
+                    <a:srgbClr val="0E7490"/>
                   </a:solidFill>
                   <a:latin typeface="Arial"/>
                   <a:ea typeface="Microsoft YaHei"/>
@@ -4969,7 +5285,7 @@
 </p:sld>
 </file>
 
-<file path=ppt/slides/slide3.xml><?xml version="1.0" encoding="utf-8"?>
+<file path=ppt/slides/slide4.xml><?xml version="1.0" encoding="utf-8"?>
 <p:sld xmlns:a="http://schemas.openxmlformats.org/drawingml/2006/main" xmlns:r="http://schemas.openxmlformats.org/officeDocument/2006/relationships" xmlns:p="http://schemas.openxmlformats.org/presentationml/2006/main">
   <p:cSld>
     <p:spTree>
@@ -5023,7 +5339,7 @@
             <a:avLst/>
           </a:prstGeom>
           <a:solidFill>
-            <a:srgbClr val="003366"/>
+            <a:srgbClr val="0E7490"/>
           </a:solidFill>
           <a:ln>
             <a:noFill/>
@@ -5127,7 +5443,7 @@
                 <a:ea typeface="Microsoft YaHei"/>
                 <a:cs typeface="Arial"/>
               </a:rPr>
-              <a:t>机制与流程</a:t>
+              <a:t>架构与执行链路</a:t>
             </a:r>
           </a:p>
         </p:txBody>
@@ -5209,7 +5525,7 @@
             <a:avLst/>
           </a:prstGeom>
           <a:solidFill>
-            <a:srgbClr val="0066CC"/>
+            <a:srgbClr val="06B6D4"/>
           </a:solidFill>
           <a:ln>
             <a:noFill/>
@@ -5251,7 +5567,7 @@
                 <a:ea typeface="Microsoft YaHei"/>
                 <a:cs typeface="Arial"/>
               </a:rPr>
-              <a:t>三步走：理解→实现→验证</a:t>
+              <a:t>一图看懂本讲的机制流转</a:t>
             </a:r>
           </a:p>
         </p:txBody>
@@ -5407,23 +5723,23 @@
                 <a:ea typeface="Microsoft YaHei"/>
                 <a:cs typeface="Arial"/>
               </a:rPr>
-              <a:t>03</a:t>
+              <a:t>04</a:t>
             </a:r>
           </a:p>
         </p:txBody>
       </p:sp>
       <p:grpSp>
         <p:nvGrpSpPr>
-          <p:cNvPr id="22" name="EasySlides Component: step_01"/>
+          <p:cNvPr id="26" name="EasySlides Component: evidence"/>
           <p:cNvGrpSpPr/>
           <p:nvPr/>
         </p:nvGrpSpPr>
         <p:grpSpPr>
           <a:xfrm>
-            <a:off x="495300" y="1285875"/>
-            <a:ext cx="3505200" cy="3476625"/>
-            <a:chOff x="495300" y="1285875"/>
-            <a:chExt cx="3505200" cy="3476625"/>
+            <a:off x="7124700" y="1285875"/>
+            <a:ext cx="4572000" cy="4905375"/>
+            <a:chOff x="7124700" y="1285875"/>
+            <a:chExt cx="4572000" cy="4905375"/>
           </a:xfrm>
         </p:grpSpPr>
         <p:sp>
@@ -5434,12 +5750,393 @@
           </p:nvSpPr>
           <p:spPr>
             <a:xfrm>
-              <a:off x="495300" y="1285875"/>
-              <a:ext cx="3505200" cy="3476625"/>
+              <a:off x="7124700" y="1285875"/>
+              <a:ext cx="4572000" cy="4905375"/>
             </a:xfrm>
             <a:prstGeom prst="roundRect">
               <a:avLst>
-                <a:gd name="adj" fmla="val 1096"/>
+                <a:gd name="adj" fmla="val 833"/>
+              </a:avLst>
+            </a:prstGeom>
+            <a:solidFill>
+              <a:srgbClr val="F0F9FC"/>
+            </a:solidFill>
+            <a:ln w="11430">
+              <a:solidFill>
+                <a:srgbClr val="B8C7D6"/>
+              </a:solidFill>
+            </a:ln>
+          </p:spPr>
+        </p:sp>
+        <p:sp>
+          <p:nvSpPr>
+            <p:cNvPr id="16" name="Rectangle 16"/>
+            <p:cNvSpPr/>
+            <p:nvPr/>
+          </p:nvSpPr>
+          <p:spPr>
+            <a:xfrm>
+              <a:off x="7124700" y="1285875"/>
+              <a:ext cx="76200" cy="4905375"/>
+            </a:xfrm>
+            <a:prstGeom prst="rect">
+              <a:avLst/>
+            </a:prstGeom>
+            <a:solidFill>
+              <a:srgbClr val="06B6D4"/>
+            </a:solidFill>
+            <a:ln>
+              <a:noFill/>
+            </a:ln>
+          </p:spPr>
+        </p:sp>
+        <p:sp>
+          <p:nvSpPr>
+            <p:cNvPr id="17" name="Rectangle 17"/>
+            <p:cNvSpPr/>
+            <p:nvPr/>
+          </p:nvSpPr>
+          <p:spPr>
+            <a:xfrm>
+              <a:off x="7391400" y="1552575"/>
+              <a:ext cx="4038600" cy="1257300"/>
+            </a:xfrm>
+            <a:prstGeom prst="roundRect">
+              <a:avLst>
+                <a:gd name="adj" fmla="val 1515"/>
+              </a:avLst>
+            </a:prstGeom>
+            <a:solidFill>
+              <a:srgbClr val="FFFFFF"/>
+            </a:solidFill>
+            <a:ln w="9525">
+              <a:solidFill>
+                <a:srgbClr val="D4E2EE"/>
+              </a:solidFill>
+            </a:ln>
+          </p:spPr>
+        </p:sp>
+        <p:sp>
+          <p:nvSpPr>
+            <p:cNvPr id="18" name="Rectangle 18"/>
+            <p:cNvSpPr/>
+            <p:nvPr/>
+          </p:nvSpPr>
+          <p:spPr>
+            <a:xfrm>
+              <a:off x="7391400" y="3105150"/>
+              <a:ext cx="4038600" cy="1257300"/>
+            </a:xfrm>
+            <a:prstGeom prst="roundRect">
+              <a:avLst>
+                <a:gd name="adj" fmla="val 1515"/>
+              </a:avLst>
+            </a:prstGeom>
+            <a:solidFill>
+              <a:srgbClr val="FFFFFF"/>
+            </a:solidFill>
+            <a:ln w="9525">
+              <a:solidFill>
+                <a:srgbClr val="D4E2EE"/>
+              </a:solidFill>
+            </a:ln>
+          </p:spPr>
+        </p:sp>
+        <p:sp>
+          <p:nvSpPr>
+            <p:cNvPr id="19" name="Rectangle 19"/>
+            <p:cNvSpPr/>
+            <p:nvPr/>
+          </p:nvSpPr>
+          <p:spPr>
+            <a:xfrm>
+              <a:off x="7391400" y="4657725"/>
+              <a:ext cx="4038600" cy="1257300"/>
+            </a:xfrm>
+            <a:prstGeom prst="roundRect">
+              <a:avLst>
+                <a:gd name="adj" fmla="val 1515"/>
+              </a:avLst>
+            </a:prstGeom>
+            <a:solidFill>
+              <a:srgbClr val="FFFFFF"/>
+            </a:solidFill>
+            <a:ln w="9525">
+              <a:solidFill>
+                <a:srgbClr val="D4E2EE"/>
+              </a:solidFill>
+            </a:ln>
+          </p:spPr>
+        </p:sp>
+        <p:sp>
+          <p:nvSpPr>
+            <p:cNvPr id="20" name="TextBox 20"/>
+            <p:cNvSpPr txBox="1"/>
+            <p:nvPr/>
+          </p:nvSpPr>
+          <p:spPr>
+            <a:xfrm>
+              <a:off x="7605712" y="1745456"/>
+              <a:ext cx="220156" cy="228600"/>
+            </a:xfrm>
+            <a:prstGeom prst="rect">
+              <a:avLst/>
+            </a:prstGeom>
+            <a:noFill/>
+            <a:ln>
+              <a:noFill/>
+            </a:ln>
+          </p:spPr>
+          <p:txBody>
+            <a:bodyPr wrap="none" lIns="0" tIns="0" rIns="0" bIns="0" anchor="t" anchorCtr="0">
+              <a:spAutoFit/>
+            </a:bodyPr>
+            <a:lstStyle/>
+            <a:p>
+              <a:pPr algn="l"/>
+              <a:r>
+                <a:rPr lang="zh-CN" sz="1125" b="1" dirty="0">
+                  <a:solidFill>
+                    <a:srgbClr val="06B6D4"/>
+                  </a:solidFill>
+                  <a:latin typeface="Arial"/>
+                  <a:ea typeface="Microsoft YaHei"/>
+                  <a:cs typeface="Arial"/>
+                </a:rPr>
+                <a:t>01</a:t>
+              </a:r>
+            </a:p>
+          </p:txBody>
+        </p:sp>
+        <p:sp>
+          <p:nvSpPr>
+            <p:cNvPr id="21" name="TextBox 21"/>
+            <p:cNvSpPr txBox="1"/>
+            <p:nvPr/>
+          </p:nvSpPr>
+          <p:spPr>
+            <a:xfrm>
+              <a:off x="7605712" y="3298031"/>
+              <a:ext cx="220156" cy="228600"/>
+            </a:xfrm>
+            <a:prstGeom prst="rect">
+              <a:avLst/>
+            </a:prstGeom>
+            <a:noFill/>
+            <a:ln>
+              <a:noFill/>
+            </a:ln>
+          </p:spPr>
+          <p:txBody>
+            <a:bodyPr wrap="none" lIns="0" tIns="0" rIns="0" bIns="0" anchor="t" anchorCtr="0">
+              <a:spAutoFit/>
+            </a:bodyPr>
+            <a:lstStyle/>
+            <a:p>
+              <a:pPr algn="l"/>
+              <a:r>
+                <a:rPr lang="zh-CN" sz="1125" b="1" dirty="0">
+                  <a:solidFill>
+                    <a:srgbClr val="06B6D4"/>
+                  </a:solidFill>
+                  <a:latin typeface="Arial"/>
+                  <a:ea typeface="Microsoft YaHei"/>
+                  <a:cs typeface="Arial"/>
+                </a:rPr>
+                <a:t>02</a:t>
+              </a:r>
+            </a:p>
+          </p:txBody>
+        </p:sp>
+        <p:sp>
+          <p:nvSpPr>
+            <p:cNvPr id="22" name="TextBox 22"/>
+            <p:cNvSpPr txBox="1"/>
+            <p:nvPr/>
+          </p:nvSpPr>
+          <p:spPr>
+            <a:xfrm>
+              <a:off x="7605712" y="4850606"/>
+              <a:ext cx="220156" cy="228600"/>
+            </a:xfrm>
+            <a:prstGeom prst="rect">
+              <a:avLst/>
+            </a:prstGeom>
+            <a:noFill/>
+            <a:ln>
+              <a:noFill/>
+            </a:ln>
+          </p:spPr>
+          <p:txBody>
+            <a:bodyPr wrap="none" lIns="0" tIns="0" rIns="0" bIns="0" anchor="t" anchorCtr="0">
+              <a:spAutoFit/>
+            </a:bodyPr>
+            <a:lstStyle/>
+            <a:p>
+              <a:pPr algn="l"/>
+              <a:r>
+                <a:rPr lang="zh-CN" sz="1125" b="1" dirty="0">
+                  <a:solidFill>
+                    <a:srgbClr val="CC0000"/>
+                  </a:solidFill>
+                  <a:latin typeface="Arial"/>
+                  <a:ea typeface="Microsoft YaHei"/>
+                  <a:cs typeface="Arial"/>
+                </a:rPr>
+                <a:t>03</a:t>
+              </a:r>
+            </a:p>
+          </p:txBody>
+        </p:sp>
+        <p:sp>
+          <p:nvSpPr>
+            <p:cNvPr id="23" name="TextBox 23"/>
+            <p:cNvSpPr txBox="1"/>
+            <p:nvPr/>
+          </p:nvSpPr>
+          <p:spPr>
+            <a:xfrm>
+              <a:off x="7848600" y="1819275"/>
+              <a:ext cx="3314700" cy="723900"/>
+            </a:xfrm>
+            <a:prstGeom prst="rect">
+              <a:avLst/>
+            </a:prstGeom>
+            <a:noFill/>
+            <a:ln>
+              <a:noFill/>
+            </a:ln>
+          </p:spPr>
+          <p:txBody>
+            <a:bodyPr wrap="square" lIns="0" tIns="0" rIns="0" bIns="0" anchor="ctr" anchorCtr="0">
+              <a:normAutofit/>
+            </a:bodyPr>
+            <a:lstStyle/>
+            <a:p>
+              <a:pPr algn="l"/>
+              <a:r>
+                <a:rPr lang="zh-CN" sz="1425" dirty="0">
+                  <a:solidFill>
+                    <a:srgbClr val="26384A"/>
+                  </a:solidFill>
+                  <a:latin typeface="Arial"/>
+                  <a:ea typeface="Microsoft YaHei"/>
+                  <a:cs typeface="Arial"/>
+                </a:rPr>
+                <a:t>单 Loop：简单探索</a:t>
+              </a:r>
+            </a:p>
+          </p:txBody>
+        </p:sp>
+        <p:sp>
+          <p:nvSpPr>
+            <p:cNvPr id="24" name="TextBox 24"/>
+            <p:cNvSpPr txBox="1"/>
+            <p:nvPr/>
+          </p:nvSpPr>
+          <p:spPr>
+            <a:xfrm>
+              <a:off x="7848600" y="3371850"/>
+              <a:ext cx="3314700" cy="723900"/>
+            </a:xfrm>
+            <a:prstGeom prst="rect">
+              <a:avLst/>
+            </a:prstGeom>
+            <a:noFill/>
+            <a:ln>
+              <a:noFill/>
+            </a:ln>
+          </p:spPr>
+          <p:txBody>
+            <a:bodyPr wrap="square" lIns="0" tIns="0" rIns="0" bIns="0" anchor="ctr" anchorCtr="0">
+              <a:normAutofit/>
+            </a:bodyPr>
+            <a:lstStyle/>
+            <a:p>
+              <a:pPr algn="l"/>
+              <a:r>
+                <a:rPr lang="zh-CN" sz="1425" dirty="0">
+                  <a:solidFill>
+                    <a:srgbClr val="26384A"/>
+                  </a:solidFill>
+                  <a:latin typeface="Arial"/>
+                  <a:ea typeface="Microsoft YaHei"/>
+                  <a:cs typeface="Arial"/>
+                </a:rPr>
+                <a:t>固定：确定性/合规</a:t>
+              </a:r>
+            </a:p>
+          </p:txBody>
+        </p:sp>
+        <p:sp>
+          <p:nvSpPr>
+            <p:cNvPr id="25" name="TextBox 25"/>
+            <p:cNvSpPr txBox="1"/>
+            <p:nvPr/>
+          </p:nvSpPr>
+          <p:spPr>
+            <a:xfrm>
+              <a:off x="7848600" y="4924425"/>
+              <a:ext cx="3314700" cy="723900"/>
+            </a:xfrm>
+            <a:prstGeom prst="rect">
+              <a:avLst/>
+            </a:prstGeom>
+            <a:noFill/>
+            <a:ln>
+              <a:noFill/>
+            </a:ln>
+          </p:spPr>
+          <p:txBody>
+            <a:bodyPr wrap="square" lIns="0" tIns="0" rIns="0" bIns="0" anchor="ctr" anchorCtr="0">
+              <a:normAutofit/>
+            </a:bodyPr>
+            <a:lstStyle/>
+            <a:p>
+              <a:pPr algn="l"/>
+              <a:r>
+                <a:rPr lang="zh-CN" sz="1425" dirty="0">
+                  <a:solidFill>
+                    <a:srgbClr val="26384A"/>
+                  </a:solidFill>
+                  <a:latin typeface="Arial"/>
+                  <a:ea typeface="Microsoft YaHei"/>
+                  <a:cs typeface="Arial"/>
+                </a:rPr>
+                <a:t>落点：仓库验证</a:t>
+              </a:r>
+            </a:p>
+          </p:txBody>
+        </p:sp>
+      </p:grpSp>
+      <p:grpSp>
+        <p:nvGrpSpPr>
+          <p:cNvPr id="32" name="EasySlides Component: figure"/>
+          <p:cNvGrpSpPr/>
+          <p:nvPr/>
+        </p:nvGrpSpPr>
+        <p:grpSpPr>
+          <a:xfrm>
+            <a:off x="495300" y="1285875"/>
+            <a:ext cx="6400800" cy="4905375"/>
+            <a:chOff x="495300" y="1285875"/>
+            <a:chExt cx="6400800" cy="4905375"/>
+          </a:xfrm>
+        </p:grpSpPr>
+        <p:sp>
+          <p:nvSpPr>
+            <p:cNvPr id="27" name="Rectangle 27"/>
+            <p:cNvSpPr/>
+            <p:nvPr/>
+          </p:nvSpPr>
+          <p:spPr>
+            <a:xfrm>
+              <a:off x="495300" y="1285875"/>
+              <a:ext cx="6400800" cy="4905375"/>
+            </a:xfrm>
+            <a:prstGeom prst="roundRect">
+              <a:avLst>
+                <a:gd name="adj" fmla="val 777"/>
               </a:avLst>
             </a:prstGeom>
             <a:solidFill>
@@ -5454,36 +6151,100 @@
         </p:sp>
         <p:sp>
           <p:nvSpPr>
-            <p:cNvPr id="16" name="Ellipse 16"/>
+            <p:cNvPr id="28" name="Rectangle 28"/>
             <p:cNvSpPr/>
             <p:nvPr/>
           </p:nvSpPr>
           <p:spPr>
             <a:xfrm>
-              <a:off x="695325" y="1495425"/>
-              <a:ext cx="476250" cy="476250"/>
+              <a:off x="647700" y="1438275"/>
+              <a:ext cx="6096000" cy="3905250"/>
             </a:xfrm>
-            <a:prstGeom prst="ellipse">
+            <a:prstGeom prst="roundRect">
+              <a:avLst>
+                <a:gd name="adj" fmla="val 488"/>
+              </a:avLst>
+            </a:prstGeom>
+            <a:solidFill>
+              <a:srgbClr val="F0F9FC"/>
+            </a:solidFill>
+            <a:ln w="9525">
+              <a:solidFill>
+                <a:srgbClr val="D4E2EE"/>
+              </a:solidFill>
+            </a:ln>
+          </p:spPr>
+        </p:sp>
+        <p:pic>
+          <p:nvPicPr>
+            <p:cNvPr id="29" name="Image 29"/>
+            <p:cNvPicPr>
+              <a:picLocks noChangeAspect="1"/>
+            </p:cNvPicPr>
+            <p:nvPr/>
+          </p:nvPicPr>
+          <p:blipFill>
+            <a:blip r:embed="rId2"/>
+            <a:stretch>
+              <a:fillRect/>
+            </a:stretch>
+          </p:blipFill>
+          <p:spPr>
+            <a:xfrm>
+              <a:off x="647700" y="1605643"/>
+              <a:ext cx="6096000" cy="3570514"/>
+            </a:xfrm>
+            <a:prstGeom prst="rect">
               <a:avLst/>
             </a:prstGeom>
-            <a:solidFill>
-              <a:srgbClr val="0066CC"/>
-            </a:solidFill>
-            <a:ln>
-              <a:noFill/>
+          </p:spPr>
+        </p:pic>
+        <p:sp>
+          <p:nvSpPr>
+            <p:cNvPr id="30" name="Line 30"/>
+            <p:cNvSpPr/>
+            <p:nvPr/>
+          </p:nvSpPr>
+          <p:spPr>
+            <a:xfrm>
+              <a:off x="723900" y="5534025"/>
+              <a:ext cx="5943600" cy="9525"/>
+            </a:xfrm>
+            <a:custGeom>
+              <a:avLst/>
+              <a:gdLst/>
+              <a:ahLst/>
+              <a:cxnLst/>
+              <a:rect l="l" t="t" r="r" b="b"/>
+              <a:pathLst>
+                <a:path w="5943600" h="9525">
+                  <a:moveTo>
+                    <a:pt x="0" y="0"/>
+                  </a:moveTo>
+                  <a:lnTo>
+                    <a:pt x="5943600" y="0"/>
+                  </a:lnTo>
+                </a:path>
+              </a:pathLst>
+            </a:custGeom>
+            <a:noFill/>
+            <a:ln w="9525">
+              <a:solidFill>
+                <a:srgbClr val="D4E2EE"/>
+              </a:solidFill>
             </a:ln>
           </p:spPr>
         </p:sp>
         <p:sp>
           <p:nvSpPr>
-            <p:cNvPr id="17" name="TextBox 17"/>
+            <p:cNvPr id="31" name="TextBox 31"/>
             <p:cNvSpPr txBox="1"/>
             <p:nvPr/>
           </p:nvSpPr>
           <p:spPr>
             <a:xfrm>
-              <a:off x="714375" y="1504950"/>
-              <a:ext cx="438150" cy="457200"/>
+              <a:off x="800100" y="5610225"/>
+              <a:ext cx="5791200" cy="457200"/>
             </a:xfrm>
             <a:prstGeom prst="rect">
               <a:avLst/>
@@ -5501,738 +6262,15 @@
             <a:p>
               <a:pPr algn="ctr"/>
               <a:r>
-                <a:rPr lang="zh-CN" sz="1350" b="1" dirty="0">
+                <a:rPr lang="zh-CN" sz="1350" dirty="0">
                   <a:solidFill>
-                    <a:srgbClr val="FFFFFF"/>
+                    <a:srgbClr val="52657A"/>
                   </a:solidFill>
                   <a:latin typeface="Arial"/>
                   <a:ea typeface="Microsoft YaHei"/>
                   <a:cs typeface="Arial"/>
                 </a:rPr>
-                <a:t>1</a:t>
-              </a:r>
-            </a:p>
-          </p:txBody>
-        </p:sp>
-        <p:sp>
-          <p:nvSpPr>
-            <p:cNvPr id="18" name="TextBox 18"/>
-            <p:cNvSpPr txBox="1"/>
-            <p:nvPr/>
-          </p:nvSpPr>
-          <p:spPr>
-            <a:xfrm>
-              <a:off x="1314450" y="1524000"/>
-              <a:ext cx="2324100" cy="428625"/>
-            </a:xfrm>
-            <a:prstGeom prst="rect">
-              <a:avLst/>
-            </a:prstGeom>
-            <a:noFill/>
-            <a:ln>
-              <a:noFill/>
-            </a:ln>
-          </p:spPr>
-          <p:txBody>
-            <a:bodyPr wrap="square" lIns="0" tIns="0" rIns="0" bIns="0" anchor="ctr" anchorCtr="0">
-              <a:normAutofit/>
-            </a:bodyPr>
-            <a:lstStyle/>
-            <a:p>
-              <a:pPr algn="l"/>
-              <a:r>
-                <a:rPr lang="zh-CN" sz="1650" b="1" dirty="0">
-                  <a:solidFill>
-                    <a:srgbClr val="003366"/>
-                  </a:solidFill>
-                  <a:latin typeface="Arial"/>
-                  <a:ea typeface="Microsoft YaHei"/>
-                  <a:cs typeface="Arial"/>
-                </a:rPr>
-                <a:t>单 Loop</a:t>
-              </a:r>
-            </a:p>
-          </p:txBody>
-        </p:sp>
-        <p:sp>
-          <p:nvSpPr>
-            <p:cNvPr id="19" name="Line 19"/>
-            <p:cNvSpPr/>
-            <p:nvPr/>
-          </p:nvSpPr>
-          <p:spPr>
-            <a:xfrm>
-              <a:off x="800100" y="2181225"/>
-              <a:ext cx="2895600" cy="9525"/>
-            </a:xfrm>
-            <a:custGeom>
-              <a:avLst/>
-              <a:gdLst/>
-              <a:ahLst/>
-              <a:cxnLst/>
-              <a:rect l="l" t="t" r="r" b="b"/>
-              <a:pathLst>
-                <a:path w="2895600" h="9525">
-                  <a:moveTo>
-                    <a:pt x="0" y="0"/>
-                  </a:moveTo>
-                  <a:lnTo>
-                    <a:pt x="2895600" y="0"/>
-                  </a:lnTo>
-                </a:path>
-              </a:pathLst>
-            </a:custGeom>
-            <a:noFill/>
-            <a:ln w="19050">
-              <a:solidFill>
-                <a:srgbClr val="D4E2EE"/>
-              </a:solidFill>
-            </a:ln>
-          </p:spPr>
-        </p:sp>
-        <p:sp>
-          <p:nvSpPr>
-            <p:cNvPr id="20" name="TextBox 20"/>
-            <p:cNvSpPr txBox="1"/>
-            <p:nvPr/>
-          </p:nvSpPr>
-          <p:spPr>
-            <a:xfrm>
-              <a:off x="952500" y="2476500"/>
-              <a:ext cx="2590800" cy="1666875"/>
-            </a:xfrm>
-            <a:prstGeom prst="rect">
-              <a:avLst/>
-            </a:prstGeom>
-            <a:noFill/>
-            <a:ln>
-              <a:noFill/>
-            </a:ln>
-          </p:spPr>
-          <p:txBody>
-            <a:bodyPr wrap="square" lIns="0" tIns="0" rIns="0" bIns="0" anchor="ctr" anchorCtr="0">
-              <a:normAutofit/>
-            </a:bodyPr>
-            <a:lstStyle/>
-            <a:p>
-              <a:pPr algn="l"/>
-              <a:r>
-                <a:rPr lang="zh-CN" sz="1500" dirty="0">
-                  <a:solidFill>
-                    <a:srgbClr val="26384A"/>
-                  </a:solidFill>
-                  <a:latin typeface="Arial"/>
-                  <a:ea typeface="Microsoft YaHei"/>
-                  <a:cs typeface="Arial"/>
-                </a:rPr>
-                <a:t>简单探索</a:t>
-              </a:r>
-            </a:p>
-          </p:txBody>
-        </p:sp>
-        <p:sp>
-          <p:nvSpPr>
-            <p:cNvPr id="21" name="Rectangle 21"/>
-            <p:cNvSpPr/>
-            <p:nvPr/>
-          </p:nvSpPr>
-          <p:spPr>
-            <a:xfrm>
-              <a:off x="800100" y="4391025"/>
-              <a:ext cx="762000" cy="66675"/>
-            </a:xfrm>
-            <a:prstGeom prst="rect">
-              <a:avLst/>
-            </a:prstGeom>
-            <a:solidFill>
-              <a:srgbClr val="CC0000"/>
-            </a:solidFill>
-            <a:ln>
-              <a:noFill/>
-            </a:ln>
-          </p:spPr>
-        </p:sp>
-      </p:grpSp>
-      <p:grpSp>
-        <p:nvGrpSpPr>
-          <p:cNvPr id="30" name="EasySlides Component: step_02"/>
-          <p:cNvGrpSpPr/>
-          <p:nvPr/>
-        </p:nvGrpSpPr>
-        <p:grpSpPr>
-          <a:xfrm>
-            <a:off x="4343400" y="1285875"/>
-            <a:ext cx="3505200" cy="3476625"/>
-            <a:chOff x="4343400" y="1285875"/>
-            <a:chExt cx="3505200" cy="3476625"/>
-          </a:xfrm>
-        </p:grpSpPr>
-        <p:sp>
-          <p:nvSpPr>
-            <p:cNvPr id="23" name="Rectangle 23"/>
-            <p:cNvSpPr/>
-            <p:nvPr/>
-          </p:nvSpPr>
-          <p:spPr>
-            <a:xfrm>
-              <a:off x="4343400" y="1285875"/>
-              <a:ext cx="3505200" cy="3476625"/>
-            </a:xfrm>
-            <a:prstGeom prst="roundRect">
-              <a:avLst>
-                <a:gd name="adj" fmla="val 1096"/>
-              </a:avLst>
-            </a:prstGeom>
-            <a:solidFill>
-              <a:srgbClr val="FFFFFF"/>
-            </a:solidFill>
-            <a:ln w="11430">
-              <a:solidFill>
-                <a:srgbClr val="B8C7D6"/>
-              </a:solidFill>
-            </a:ln>
-          </p:spPr>
-        </p:sp>
-        <p:sp>
-          <p:nvSpPr>
-            <p:cNvPr id="24" name="Ellipse 24"/>
-            <p:cNvSpPr/>
-            <p:nvPr/>
-          </p:nvSpPr>
-          <p:spPr>
-            <a:xfrm>
-              <a:off x="4543425" y="1495425"/>
-              <a:ext cx="476250" cy="476250"/>
-            </a:xfrm>
-            <a:prstGeom prst="ellipse">
-              <a:avLst/>
-            </a:prstGeom>
-            <a:solidFill>
-              <a:srgbClr val="0066CC"/>
-            </a:solidFill>
-            <a:ln>
-              <a:noFill/>
-            </a:ln>
-          </p:spPr>
-        </p:sp>
-        <p:sp>
-          <p:nvSpPr>
-            <p:cNvPr id="25" name="TextBox 25"/>
-            <p:cNvSpPr txBox="1"/>
-            <p:nvPr/>
-          </p:nvSpPr>
-          <p:spPr>
-            <a:xfrm>
-              <a:off x="4562475" y="1504950"/>
-              <a:ext cx="438150" cy="457200"/>
-            </a:xfrm>
-            <a:prstGeom prst="rect">
-              <a:avLst/>
-            </a:prstGeom>
-            <a:noFill/>
-            <a:ln>
-              <a:noFill/>
-            </a:ln>
-          </p:spPr>
-          <p:txBody>
-            <a:bodyPr wrap="square" lIns="0" tIns="0" rIns="0" bIns="0" anchor="ctr" anchorCtr="0">
-              <a:normAutofit/>
-            </a:bodyPr>
-            <a:lstStyle/>
-            <a:p>
-              <a:pPr algn="ctr"/>
-              <a:r>
-                <a:rPr lang="zh-CN" sz="1350" b="1" dirty="0">
-                  <a:solidFill>
-                    <a:srgbClr val="FFFFFF"/>
-                  </a:solidFill>
-                  <a:latin typeface="Arial"/>
-                  <a:ea typeface="Microsoft YaHei"/>
-                  <a:cs typeface="Arial"/>
-                </a:rPr>
-                <a:t>2</a:t>
-              </a:r>
-            </a:p>
-          </p:txBody>
-        </p:sp>
-        <p:sp>
-          <p:nvSpPr>
-            <p:cNvPr id="26" name="TextBox 26"/>
-            <p:cNvSpPr txBox="1"/>
-            <p:nvPr/>
-          </p:nvSpPr>
-          <p:spPr>
-            <a:xfrm>
-              <a:off x="5162550" y="1524000"/>
-              <a:ext cx="2324100" cy="428625"/>
-            </a:xfrm>
-            <a:prstGeom prst="rect">
-              <a:avLst/>
-            </a:prstGeom>
-            <a:noFill/>
-            <a:ln>
-              <a:noFill/>
-            </a:ln>
-          </p:spPr>
-          <p:txBody>
-            <a:bodyPr wrap="square" lIns="0" tIns="0" rIns="0" bIns="0" anchor="ctr" anchorCtr="0">
-              <a:normAutofit/>
-            </a:bodyPr>
-            <a:lstStyle/>
-            <a:p>
-              <a:pPr algn="l"/>
-              <a:r>
-                <a:rPr lang="zh-CN" sz="1650" b="1" dirty="0">
-                  <a:solidFill>
-                    <a:srgbClr val="003366"/>
-                  </a:solidFill>
-                  <a:latin typeface="Arial"/>
-                  <a:ea typeface="Microsoft YaHei"/>
-                  <a:cs typeface="Arial"/>
-                </a:rPr>
-                <a:t>固定</a:t>
-              </a:r>
-            </a:p>
-          </p:txBody>
-        </p:sp>
-        <p:sp>
-          <p:nvSpPr>
-            <p:cNvPr id="27" name="Line 27"/>
-            <p:cNvSpPr/>
-            <p:nvPr/>
-          </p:nvSpPr>
-          <p:spPr>
-            <a:xfrm>
-              <a:off x="4648200" y="2181225"/>
-              <a:ext cx="2895600" cy="9525"/>
-            </a:xfrm>
-            <a:custGeom>
-              <a:avLst/>
-              <a:gdLst/>
-              <a:ahLst/>
-              <a:cxnLst/>
-              <a:rect l="l" t="t" r="r" b="b"/>
-              <a:pathLst>
-                <a:path w="2895600" h="9525">
-                  <a:moveTo>
-                    <a:pt x="0" y="0"/>
-                  </a:moveTo>
-                  <a:lnTo>
-                    <a:pt x="2895600" y="0"/>
-                  </a:lnTo>
-                </a:path>
-              </a:pathLst>
-            </a:custGeom>
-            <a:noFill/>
-            <a:ln w="19050">
-              <a:solidFill>
-                <a:srgbClr val="D4E2EE"/>
-              </a:solidFill>
-            </a:ln>
-          </p:spPr>
-        </p:sp>
-        <p:sp>
-          <p:nvSpPr>
-            <p:cNvPr id="28" name="TextBox 28"/>
-            <p:cNvSpPr txBox="1"/>
-            <p:nvPr/>
-          </p:nvSpPr>
-          <p:spPr>
-            <a:xfrm>
-              <a:off x="4800600" y="2476500"/>
-              <a:ext cx="2590800" cy="1666875"/>
-            </a:xfrm>
-            <a:prstGeom prst="rect">
-              <a:avLst/>
-            </a:prstGeom>
-            <a:noFill/>
-            <a:ln>
-              <a:noFill/>
-            </a:ln>
-          </p:spPr>
-          <p:txBody>
-            <a:bodyPr wrap="square" lIns="0" tIns="0" rIns="0" bIns="0" anchor="ctr" anchorCtr="0">
-              <a:normAutofit/>
-            </a:bodyPr>
-            <a:lstStyle/>
-            <a:p>
-              <a:pPr algn="l"/>
-              <a:r>
-                <a:rPr lang="zh-CN" sz="1500" dirty="0">
-                  <a:solidFill>
-                    <a:srgbClr val="26384A"/>
-                  </a:solidFill>
-                  <a:latin typeface="Arial"/>
-                  <a:ea typeface="Microsoft YaHei"/>
-                  <a:cs typeface="Arial"/>
-                </a:rPr>
-                <a:t>确定性/合规</a:t>
-              </a:r>
-            </a:p>
-          </p:txBody>
-        </p:sp>
-        <p:sp>
-          <p:nvSpPr>
-            <p:cNvPr id="29" name="Rectangle 29"/>
-            <p:cNvSpPr/>
-            <p:nvPr/>
-          </p:nvSpPr>
-          <p:spPr>
-            <a:xfrm>
-              <a:off x="4648200" y="4391025"/>
-              <a:ext cx="762000" cy="66675"/>
-            </a:xfrm>
-            <a:prstGeom prst="rect">
-              <a:avLst/>
-            </a:prstGeom>
-            <a:solidFill>
-              <a:srgbClr val="CC0000"/>
-            </a:solidFill>
-            <a:ln>
-              <a:noFill/>
-            </a:ln>
-          </p:spPr>
-        </p:sp>
-      </p:grpSp>
-      <p:grpSp>
-        <p:nvGrpSpPr>
-          <p:cNvPr id="38" name="EasySlides Component: step_03"/>
-          <p:cNvGrpSpPr/>
-          <p:nvPr/>
-        </p:nvGrpSpPr>
-        <p:grpSpPr>
-          <a:xfrm>
-            <a:off x="8191500" y="1285875"/>
-            <a:ext cx="3505200" cy="3476625"/>
-            <a:chOff x="8191500" y="1285875"/>
-            <a:chExt cx="3505200" cy="3476625"/>
-          </a:xfrm>
-        </p:grpSpPr>
-        <p:sp>
-          <p:nvSpPr>
-            <p:cNvPr id="31" name="Rectangle 31"/>
-            <p:cNvSpPr/>
-            <p:nvPr/>
-          </p:nvSpPr>
-          <p:spPr>
-            <a:xfrm>
-              <a:off x="8191500" y="1285875"/>
-              <a:ext cx="3505200" cy="3476625"/>
-            </a:xfrm>
-            <a:prstGeom prst="roundRect">
-              <a:avLst>
-                <a:gd name="adj" fmla="val 1096"/>
-              </a:avLst>
-            </a:prstGeom>
-            <a:solidFill>
-              <a:srgbClr val="FFFFFF"/>
-            </a:solidFill>
-            <a:ln w="11430">
-              <a:solidFill>
-                <a:srgbClr val="B8C7D6"/>
-              </a:solidFill>
-            </a:ln>
-          </p:spPr>
-        </p:sp>
-        <p:sp>
-          <p:nvSpPr>
-            <p:cNvPr id="32" name="Ellipse 32"/>
-            <p:cNvSpPr/>
-            <p:nvPr/>
-          </p:nvSpPr>
-          <p:spPr>
-            <a:xfrm>
-              <a:off x="8391525" y="1495425"/>
-              <a:ext cx="476250" cy="476250"/>
-            </a:xfrm>
-            <a:prstGeom prst="ellipse">
-              <a:avLst/>
-            </a:prstGeom>
-            <a:solidFill>
-              <a:srgbClr val="0066CC"/>
-            </a:solidFill>
-            <a:ln>
-              <a:noFill/>
-            </a:ln>
-          </p:spPr>
-        </p:sp>
-        <p:sp>
-          <p:nvSpPr>
-            <p:cNvPr id="33" name="TextBox 33"/>
-            <p:cNvSpPr txBox="1"/>
-            <p:nvPr/>
-          </p:nvSpPr>
-          <p:spPr>
-            <a:xfrm>
-              <a:off x="8410575" y="1504950"/>
-              <a:ext cx="438150" cy="457200"/>
-            </a:xfrm>
-            <a:prstGeom prst="rect">
-              <a:avLst/>
-            </a:prstGeom>
-            <a:noFill/>
-            <a:ln>
-              <a:noFill/>
-            </a:ln>
-          </p:spPr>
-          <p:txBody>
-            <a:bodyPr wrap="square" lIns="0" tIns="0" rIns="0" bIns="0" anchor="ctr" anchorCtr="0">
-              <a:normAutofit/>
-            </a:bodyPr>
-            <a:lstStyle/>
-            <a:p>
-              <a:pPr algn="ctr"/>
-              <a:r>
-                <a:rPr lang="zh-CN" sz="1350" b="1" dirty="0">
-                  <a:solidFill>
-                    <a:srgbClr val="FFFFFF"/>
-                  </a:solidFill>
-                  <a:latin typeface="Arial"/>
-                  <a:ea typeface="Microsoft YaHei"/>
-                  <a:cs typeface="Arial"/>
-                </a:rPr>
-                <a:t>3</a:t>
-              </a:r>
-            </a:p>
-          </p:txBody>
-        </p:sp>
-        <p:sp>
-          <p:nvSpPr>
-            <p:cNvPr id="34" name="TextBox 34"/>
-            <p:cNvSpPr txBox="1"/>
-            <p:nvPr/>
-          </p:nvSpPr>
-          <p:spPr>
-            <a:xfrm>
-              <a:off x="9010650" y="1524000"/>
-              <a:ext cx="2324100" cy="428625"/>
-            </a:xfrm>
-            <a:prstGeom prst="rect">
-              <a:avLst/>
-            </a:prstGeom>
-            <a:noFill/>
-            <a:ln>
-              <a:noFill/>
-            </a:ln>
-          </p:spPr>
-          <p:txBody>
-            <a:bodyPr wrap="square" lIns="0" tIns="0" rIns="0" bIns="0" anchor="ctr" anchorCtr="0">
-              <a:normAutofit/>
-            </a:bodyPr>
-            <a:lstStyle/>
-            <a:p>
-              <a:pPr algn="l"/>
-              <a:r>
-                <a:rPr lang="zh-CN" sz="1650" b="1" dirty="0">
-                  <a:solidFill>
-                    <a:srgbClr val="003366"/>
-                  </a:solidFill>
-                  <a:latin typeface="Arial"/>
-                  <a:ea typeface="Microsoft YaHei"/>
-                  <a:cs typeface="Arial"/>
-                </a:rPr>
-                <a:t>动态 Graph</a:t>
-              </a:r>
-            </a:p>
-          </p:txBody>
-        </p:sp>
-        <p:sp>
-          <p:nvSpPr>
-            <p:cNvPr id="35" name="Line 35"/>
-            <p:cNvSpPr/>
-            <p:nvPr/>
-          </p:nvSpPr>
-          <p:spPr>
-            <a:xfrm>
-              <a:off x="8496300" y="2181225"/>
-              <a:ext cx="2895600" cy="9525"/>
-            </a:xfrm>
-            <a:custGeom>
-              <a:avLst/>
-              <a:gdLst/>
-              <a:ahLst/>
-              <a:cxnLst/>
-              <a:rect l="l" t="t" r="r" b="b"/>
-              <a:pathLst>
-                <a:path w="2895600" h="9525">
-                  <a:moveTo>
-                    <a:pt x="0" y="0"/>
-                  </a:moveTo>
-                  <a:lnTo>
-                    <a:pt x="2895600" y="0"/>
-                  </a:lnTo>
-                </a:path>
-              </a:pathLst>
-            </a:custGeom>
-            <a:noFill/>
-            <a:ln w="19050">
-              <a:solidFill>
-                <a:srgbClr val="D4E2EE"/>
-              </a:solidFill>
-            </a:ln>
-          </p:spPr>
-        </p:sp>
-        <p:sp>
-          <p:nvSpPr>
-            <p:cNvPr id="36" name="TextBox 36"/>
-            <p:cNvSpPr txBox="1"/>
-            <p:nvPr/>
-          </p:nvSpPr>
-          <p:spPr>
-            <a:xfrm>
-              <a:off x="8648700" y="2476500"/>
-              <a:ext cx="2590800" cy="1666875"/>
-            </a:xfrm>
-            <a:prstGeom prst="rect">
-              <a:avLst/>
-            </a:prstGeom>
-            <a:noFill/>
-            <a:ln>
-              <a:noFill/>
-            </a:ln>
-          </p:spPr>
-          <p:txBody>
-            <a:bodyPr wrap="square" lIns="0" tIns="0" rIns="0" bIns="0" anchor="ctr" anchorCtr="0">
-              <a:normAutofit/>
-            </a:bodyPr>
-            <a:lstStyle/>
-            <a:p>
-              <a:pPr algn="l"/>
-              <a:r>
-                <a:rPr lang="zh-CN" sz="1500" dirty="0">
-                  <a:solidFill>
-                    <a:srgbClr val="26384A"/>
-                  </a:solidFill>
-                  <a:latin typeface="Arial"/>
-                  <a:ea typeface="Microsoft YaHei"/>
-                  <a:cs typeface="Arial"/>
-                </a:rPr>
-                <a:t>复杂拓扑</a:t>
-              </a:r>
-            </a:p>
-          </p:txBody>
-        </p:sp>
-        <p:sp>
-          <p:nvSpPr>
-            <p:cNvPr id="37" name="Rectangle 37"/>
-            <p:cNvSpPr/>
-            <p:nvPr/>
-          </p:nvSpPr>
-          <p:spPr>
-            <a:xfrm>
-              <a:off x="8496300" y="4391025"/>
-              <a:ext cx="762000" cy="66675"/>
-            </a:xfrm>
-            <a:prstGeom prst="rect">
-              <a:avLst/>
-            </a:prstGeom>
-            <a:solidFill>
-              <a:srgbClr val="CC0000"/>
-            </a:solidFill>
-            <a:ln>
-              <a:noFill/>
-            </a:ln>
-          </p:spPr>
-        </p:sp>
-      </p:grpSp>
-      <p:grpSp>
-        <p:nvGrpSpPr>
-          <p:cNvPr id="42" name="EasySlides Component: synthesis"/>
-          <p:cNvGrpSpPr/>
-          <p:nvPr/>
-        </p:nvGrpSpPr>
-        <p:grpSpPr>
-          <a:xfrm>
-            <a:off x="495300" y="5476875"/>
-            <a:ext cx="11201400" cy="714375"/>
-            <a:chOff x="495300" y="5476875"/>
-            <a:chExt cx="11201400" cy="714375"/>
-          </a:xfrm>
-        </p:grpSpPr>
-        <p:sp>
-          <p:nvSpPr>
-            <p:cNvPr id="39" name="Rectangle 39"/>
-            <p:cNvSpPr/>
-            <p:nvPr/>
-          </p:nvSpPr>
-          <p:spPr>
-            <a:xfrm>
-              <a:off x="495300" y="5476875"/>
-              <a:ext cx="11201400" cy="714375"/>
-            </a:xfrm>
-            <a:prstGeom prst="roundRect">
-              <a:avLst>
-                <a:gd name="adj" fmla="val 5333"/>
-              </a:avLst>
-            </a:prstGeom>
-            <a:solidFill>
-              <a:srgbClr val="003366"/>
-            </a:solidFill>
-            <a:ln>
-              <a:noFill/>
-            </a:ln>
-          </p:spPr>
-        </p:sp>
-        <p:sp>
-          <p:nvSpPr>
-            <p:cNvPr id="40" name="Rectangle 40"/>
-            <p:cNvSpPr/>
-            <p:nvPr/>
-          </p:nvSpPr>
-          <p:spPr>
-            <a:xfrm>
-              <a:off x="495300" y="5476875"/>
-              <a:ext cx="76200" cy="714375"/>
-            </a:xfrm>
-            <a:prstGeom prst="roundRect">
-              <a:avLst>
-                <a:gd name="adj" fmla="val 50000"/>
-              </a:avLst>
-            </a:prstGeom>
-            <a:solidFill>
-              <a:srgbClr val="CC0000"/>
-            </a:solidFill>
-            <a:ln>
-              <a:noFill/>
-            </a:ln>
-          </p:spPr>
-        </p:sp>
-        <p:sp>
-          <p:nvSpPr>
-            <p:cNvPr id="41" name="TextBox 41"/>
-            <p:cNvSpPr txBox="1"/>
-            <p:nvPr/>
-          </p:nvSpPr>
-          <p:spPr>
-            <a:xfrm>
-              <a:off x="876300" y="5610225"/>
-              <a:ext cx="10439400" cy="447675"/>
-            </a:xfrm>
-            <a:prstGeom prst="rect">
-              <a:avLst/>
-            </a:prstGeom>
-            <a:noFill/>
-            <a:ln>
-              <a:noFill/>
-            </a:ln>
-          </p:spPr>
-          <p:txBody>
-            <a:bodyPr wrap="square" lIns="0" tIns="0" rIns="0" bIns="0" anchor="ctr" anchorCtr="0">
-              <a:normAutofit/>
-            </a:bodyPr>
-            <a:lstStyle/>
-            <a:p>
-              <a:pPr algn="ctr"/>
-              <a:r>
-                <a:rPr lang="zh-CN" sz="1650" b="1" dirty="0">
-                  <a:solidFill>
-                    <a:srgbClr val="FFFFFF"/>
-                  </a:solidFill>
-                  <a:latin typeface="Arial"/>
-                  <a:ea typeface="Microsoft YaHei"/>
-                  <a:cs typeface="Arial"/>
-                </a:rPr>
-                <a:t>代码落点：dataagent/infra/runtime/</a:t>
+                <a:t>图：本讲核心对象的执行链路（由讲义表格自动生成）</a:t>
               </a:r>
             </a:p>
           </p:txBody>
@@ -6246,7 +6284,7 @@
 </p:sld>
 </file>
 
-<file path=ppt/slides/slide4.xml><?xml version="1.0" encoding="utf-8"?>
+<file path=ppt/slides/slide5.xml><?xml version="1.0" encoding="utf-8"?>
 <p:sld xmlns:a="http://schemas.openxmlformats.org/drawingml/2006/main" xmlns:r="http://schemas.openxmlformats.org/officeDocument/2006/relationships" xmlns:p="http://schemas.openxmlformats.org/presentationml/2006/main">
   <p:cSld>
     <p:spTree>
@@ -6300,7 +6338,7 @@
             <a:avLst/>
           </a:prstGeom>
           <a:solidFill>
-            <a:srgbClr val="003366"/>
+            <a:srgbClr val="0E7490"/>
           </a:solidFill>
           <a:ln>
             <a:noFill/>
@@ -6404,7 +6442,7 @@
                 <a:ea typeface="Microsoft YaHei"/>
                 <a:cs typeface="Arial"/>
               </a:rPr>
-              <a:t>关键证据与结论</a:t>
+              <a:t>关键代码</a:t>
             </a:r>
           </a:p>
         </p:txBody>
@@ -6486,7 +6524,7 @@
             <a:avLst/>
           </a:prstGeom>
           <a:solidFill>
-            <a:srgbClr val="0066CC"/>
+            <a:srgbClr val="06B6D4"/>
           </a:solidFill>
           <a:ln>
             <a:noFill/>
@@ -6528,7 +6566,7 @@
                 <a:ea typeface="Microsoft YaHei"/>
                 <a:cs typeface="Arial"/>
               </a:rPr>
-              <a:t>用证据支撑工程判断</a:t>
+              <a:t>可运行实现与讲解一一对应</a:t>
             </a:r>
           </a:p>
         </p:txBody>
@@ -6684,7 +6722,1006 @@
                 <a:ea typeface="Microsoft YaHei"/>
                 <a:cs typeface="Arial"/>
               </a:rPr>
-              <a:t>04</a:t>
+              <a:t>05</a:t>
+            </a:r>
+          </a:p>
+        </p:txBody>
+      </p:sp>
+      <p:grpSp>
+        <p:nvGrpSpPr>
+          <p:cNvPr id="26" name="EasySlides Component: evidence"/>
+          <p:cNvGrpSpPr/>
+          <p:nvPr/>
+        </p:nvGrpSpPr>
+        <p:grpSpPr>
+          <a:xfrm>
+            <a:off x="7124700" y="1285875"/>
+            <a:ext cx="4572000" cy="4905375"/>
+            <a:chOff x="7124700" y="1285875"/>
+            <a:chExt cx="4572000" cy="4905375"/>
+          </a:xfrm>
+        </p:grpSpPr>
+        <p:sp>
+          <p:nvSpPr>
+            <p:cNvPr id="15" name="Rectangle 15"/>
+            <p:cNvSpPr/>
+            <p:nvPr/>
+          </p:nvSpPr>
+          <p:spPr>
+            <a:xfrm>
+              <a:off x="7124700" y="1285875"/>
+              <a:ext cx="4572000" cy="4905375"/>
+            </a:xfrm>
+            <a:prstGeom prst="roundRect">
+              <a:avLst>
+                <a:gd name="adj" fmla="val 833"/>
+              </a:avLst>
+            </a:prstGeom>
+            <a:solidFill>
+              <a:srgbClr val="F0F9FC"/>
+            </a:solidFill>
+            <a:ln w="11430">
+              <a:solidFill>
+                <a:srgbClr val="B8C7D6"/>
+              </a:solidFill>
+            </a:ln>
+          </p:spPr>
+        </p:sp>
+        <p:sp>
+          <p:nvSpPr>
+            <p:cNvPr id="16" name="Rectangle 16"/>
+            <p:cNvSpPr/>
+            <p:nvPr/>
+          </p:nvSpPr>
+          <p:spPr>
+            <a:xfrm>
+              <a:off x="7124700" y="1285875"/>
+              <a:ext cx="76200" cy="4905375"/>
+            </a:xfrm>
+            <a:prstGeom prst="rect">
+              <a:avLst/>
+            </a:prstGeom>
+            <a:solidFill>
+              <a:srgbClr val="06B6D4"/>
+            </a:solidFill>
+            <a:ln>
+              <a:noFill/>
+            </a:ln>
+          </p:spPr>
+        </p:sp>
+        <p:sp>
+          <p:nvSpPr>
+            <p:cNvPr id="17" name="Rectangle 17"/>
+            <p:cNvSpPr/>
+            <p:nvPr/>
+          </p:nvSpPr>
+          <p:spPr>
+            <a:xfrm>
+              <a:off x="7391400" y="1552575"/>
+              <a:ext cx="4038600" cy="1257300"/>
+            </a:xfrm>
+            <a:prstGeom prst="roundRect">
+              <a:avLst>
+                <a:gd name="adj" fmla="val 1515"/>
+              </a:avLst>
+            </a:prstGeom>
+            <a:solidFill>
+              <a:srgbClr val="FFFFFF"/>
+            </a:solidFill>
+            <a:ln w="9525">
+              <a:solidFill>
+                <a:srgbClr val="D4E2EE"/>
+              </a:solidFill>
+            </a:ln>
+          </p:spPr>
+        </p:sp>
+        <p:sp>
+          <p:nvSpPr>
+            <p:cNvPr id="18" name="Rectangle 18"/>
+            <p:cNvSpPr/>
+            <p:nvPr/>
+          </p:nvSpPr>
+          <p:spPr>
+            <a:xfrm>
+              <a:off x="7391400" y="3105150"/>
+              <a:ext cx="4038600" cy="1257300"/>
+            </a:xfrm>
+            <a:prstGeom prst="roundRect">
+              <a:avLst>
+                <a:gd name="adj" fmla="val 1515"/>
+              </a:avLst>
+            </a:prstGeom>
+            <a:solidFill>
+              <a:srgbClr val="FFFFFF"/>
+            </a:solidFill>
+            <a:ln w="9525">
+              <a:solidFill>
+                <a:srgbClr val="D4E2EE"/>
+              </a:solidFill>
+            </a:ln>
+          </p:spPr>
+        </p:sp>
+        <p:sp>
+          <p:nvSpPr>
+            <p:cNvPr id="19" name="Rectangle 19"/>
+            <p:cNvSpPr/>
+            <p:nvPr/>
+          </p:nvSpPr>
+          <p:spPr>
+            <a:xfrm>
+              <a:off x="7391400" y="4657725"/>
+              <a:ext cx="4038600" cy="1257300"/>
+            </a:xfrm>
+            <a:prstGeom prst="roundRect">
+              <a:avLst>
+                <a:gd name="adj" fmla="val 1515"/>
+              </a:avLst>
+            </a:prstGeom>
+            <a:solidFill>
+              <a:srgbClr val="FFFFFF"/>
+            </a:solidFill>
+            <a:ln w="9525">
+              <a:solidFill>
+                <a:srgbClr val="D4E2EE"/>
+              </a:solidFill>
+            </a:ln>
+          </p:spPr>
+        </p:sp>
+        <p:sp>
+          <p:nvSpPr>
+            <p:cNvPr id="20" name="TextBox 20"/>
+            <p:cNvSpPr txBox="1"/>
+            <p:nvPr/>
+          </p:nvSpPr>
+          <p:spPr>
+            <a:xfrm>
+              <a:off x="7605712" y="1745456"/>
+              <a:ext cx="220156" cy="228600"/>
+            </a:xfrm>
+            <a:prstGeom prst="rect">
+              <a:avLst/>
+            </a:prstGeom>
+            <a:noFill/>
+            <a:ln>
+              <a:noFill/>
+            </a:ln>
+          </p:spPr>
+          <p:txBody>
+            <a:bodyPr wrap="none" lIns="0" tIns="0" rIns="0" bIns="0" anchor="t" anchorCtr="0">
+              <a:spAutoFit/>
+            </a:bodyPr>
+            <a:lstStyle/>
+            <a:p>
+              <a:pPr algn="l"/>
+              <a:r>
+                <a:rPr lang="zh-CN" sz="1125" b="1" dirty="0">
+                  <a:solidFill>
+                    <a:srgbClr val="06B6D4"/>
+                  </a:solidFill>
+                  <a:latin typeface="Arial"/>
+                  <a:ea typeface="Microsoft YaHei"/>
+                  <a:cs typeface="Arial"/>
+                </a:rPr>
+                <a:t>01</a:t>
+              </a:r>
+            </a:p>
+          </p:txBody>
+        </p:sp>
+        <p:sp>
+          <p:nvSpPr>
+            <p:cNvPr id="21" name="TextBox 21"/>
+            <p:cNvSpPr txBox="1"/>
+            <p:nvPr/>
+          </p:nvSpPr>
+          <p:spPr>
+            <a:xfrm>
+              <a:off x="7605712" y="3298031"/>
+              <a:ext cx="220156" cy="228600"/>
+            </a:xfrm>
+            <a:prstGeom prst="rect">
+              <a:avLst/>
+            </a:prstGeom>
+            <a:noFill/>
+            <a:ln>
+              <a:noFill/>
+            </a:ln>
+          </p:spPr>
+          <p:txBody>
+            <a:bodyPr wrap="none" lIns="0" tIns="0" rIns="0" bIns="0" anchor="t" anchorCtr="0">
+              <a:spAutoFit/>
+            </a:bodyPr>
+            <a:lstStyle/>
+            <a:p>
+              <a:pPr algn="l"/>
+              <a:r>
+                <a:rPr lang="zh-CN" sz="1125" b="1" dirty="0">
+                  <a:solidFill>
+                    <a:srgbClr val="06B6D4"/>
+                  </a:solidFill>
+                  <a:latin typeface="Arial"/>
+                  <a:ea typeface="Microsoft YaHei"/>
+                  <a:cs typeface="Arial"/>
+                </a:rPr>
+                <a:t>02</a:t>
+              </a:r>
+            </a:p>
+          </p:txBody>
+        </p:sp>
+        <p:sp>
+          <p:nvSpPr>
+            <p:cNvPr id="22" name="TextBox 22"/>
+            <p:cNvSpPr txBox="1"/>
+            <p:nvPr/>
+          </p:nvSpPr>
+          <p:spPr>
+            <a:xfrm>
+              <a:off x="7605712" y="4850606"/>
+              <a:ext cx="220156" cy="228600"/>
+            </a:xfrm>
+            <a:prstGeom prst="rect">
+              <a:avLst/>
+            </a:prstGeom>
+            <a:noFill/>
+            <a:ln>
+              <a:noFill/>
+            </a:ln>
+          </p:spPr>
+          <p:txBody>
+            <a:bodyPr wrap="none" lIns="0" tIns="0" rIns="0" bIns="0" anchor="t" anchorCtr="0">
+              <a:spAutoFit/>
+            </a:bodyPr>
+            <a:lstStyle/>
+            <a:p>
+              <a:pPr algn="l"/>
+              <a:r>
+                <a:rPr lang="zh-CN" sz="1125" b="1" dirty="0">
+                  <a:solidFill>
+                    <a:srgbClr val="CC0000"/>
+                  </a:solidFill>
+                  <a:latin typeface="Arial"/>
+                  <a:ea typeface="Microsoft YaHei"/>
+                  <a:cs typeface="Arial"/>
+                </a:rPr>
+                <a:t>03</a:t>
+              </a:r>
+            </a:p>
+          </p:txBody>
+        </p:sp>
+        <p:sp>
+          <p:nvSpPr>
+            <p:cNvPr id="23" name="TextBox 23"/>
+            <p:cNvSpPr txBox="1"/>
+            <p:nvPr/>
+          </p:nvSpPr>
+          <p:spPr>
+            <a:xfrm>
+              <a:off x="7848600" y="1819275"/>
+              <a:ext cx="3314700" cy="723900"/>
+            </a:xfrm>
+            <a:prstGeom prst="rect">
+              <a:avLst/>
+            </a:prstGeom>
+            <a:noFill/>
+            <a:ln>
+              <a:noFill/>
+            </a:ln>
+          </p:spPr>
+          <p:txBody>
+            <a:bodyPr wrap="square" lIns="0" tIns="0" rIns="0" bIns="0" anchor="ctr" anchorCtr="0">
+              <a:normAutofit/>
+            </a:bodyPr>
+            <a:lstStyle/>
+            <a:p>
+              <a:pPr algn="l"/>
+              <a:r>
+                <a:rPr lang="zh-CN" sz="1425" dirty="0">
+                  <a:solidFill>
+                    <a:srgbClr val="26384A"/>
+                  </a:solidFill>
+                  <a:latin typeface="Arial"/>
+                  <a:ea typeface="Microsoft YaHei"/>
+                  <a:cs typeface="Arial"/>
+                </a:rPr>
+                <a:t>契约先行：接口→实现</a:t>
+              </a:r>
+            </a:p>
+          </p:txBody>
+        </p:sp>
+        <p:sp>
+          <p:nvSpPr>
+            <p:cNvPr id="24" name="TextBox 24"/>
+            <p:cNvSpPr txBox="1"/>
+            <p:nvPr/>
+          </p:nvSpPr>
+          <p:spPr>
+            <a:xfrm>
+              <a:off x="7848600" y="3371850"/>
+              <a:ext cx="3314700" cy="723900"/>
+            </a:xfrm>
+            <a:prstGeom prst="rect">
+              <a:avLst/>
+            </a:prstGeom>
+            <a:noFill/>
+            <a:ln>
+              <a:noFill/>
+            </a:ln>
+          </p:spPr>
+          <p:txBody>
+            <a:bodyPr wrap="square" lIns="0" tIns="0" rIns="0" bIns="0" anchor="ctr" anchorCtr="0">
+              <a:normAutofit/>
+            </a:bodyPr>
+            <a:lstStyle/>
+            <a:p>
+              <a:pPr algn="l"/>
+              <a:r>
+                <a:rPr lang="zh-CN" sz="1425" dirty="0">
+                  <a:solidFill>
+                    <a:srgbClr val="26384A"/>
+                  </a:solidFill>
+                  <a:latin typeface="Arial"/>
+                  <a:ea typeface="Microsoft YaHei"/>
+                  <a:cs typeface="Arial"/>
+                </a:rPr>
+                <a:t>测试见 tests/</a:t>
+              </a:r>
+            </a:p>
+          </p:txBody>
+        </p:sp>
+        <p:sp>
+          <p:nvSpPr>
+            <p:cNvPr id="25" name="TextBox 25"/>
+            <p:cNvSpPr txBox="1"/>
+            <p:nvPr/>
+          </p:nvSpPr>
+          <p:spPr>
+            <a:xfrm>
+              <a:off x="7848600" y="4924425"/>
+              <a:ext cx="3314700" cy="723900"/>
+            </a:xfrm>
+            <a:prstGeom prst="rect">
+              <a:avLst/>
+            </a:prstGeom>
+            <a:noFill/>
+            <a:ln>
+              <a:noFill/>
+            </a:ln>
+          </p:spPr>
+          <p:txBody>
+            <a:bodyPr wrap="square" lIns="0" tIns="0" rIns="0" bIns="0" anchor="ctr" anchorCtr="0">
+              <a:normAutofit/>
+            </a:bodyPr>
+            <a:lstStyle/>
+            <a:p>
+              <a:pPr algn="l"/>
+              <a:r>
+                <a:rPr lang="zh-CN" sz="1425" dirty="0">
+                  <a:solidFill>
+                    <a:srgbClr val="26384A"/>
+                  </a:solidFill>
+                  <a:latin typeface="Arial"/>
+                  <a:ea typeface="Microsoft YaHei"/>
+                  <a:cs typeface="Arial"/>
+                </a:rPr>
+                <a:t>离线可运行</a:t>
+              </a:r>
+            </a:p>
+          </p:txBody>
+        </p:sp>
+      </p:grpSp>
+      <p:grpSp>
+        <p:nvGrpSpPr>
+          <p:cNvPr id="32" name="EasySlides Component: figure"/>
+          <p:cNvGrpSpPr/>
+          <p:nvPr/>
+        </p:nvGrpSpPr>
+        <p:grpSpPr>
+          <a:xfrm>
+            <a:off x="495300" y="1285875"/>
+            <a:ext cx="6400800" cy="4905375"/>
+            <a:chOff x="495300" y="1285875"/>
+            <a:chExt cx="6400800" cy="4905375"/>
+          </a:xfrm>
+        </p:grpSpPr>
+        <p:sp>
+          <p:nvSpPr>
+            <p:cNvPr id="27" name="Rectangle 27"/>
+            <p:cNvSpPr/>
+            <p:nvPr/>
+          </p:nvSpPr>
+          <p:spPr>
+            <a:xfrm>
+              <a:off x="495300" y="1285875"/>
+              <a:ext cx="6400800" cy="4905375"/>
+            </a:xfrm>
+            <a:prstGeom prst="roundRect">
+              <a:avLst>
+                <a:gd name="adj" fmla="val 777"/>
+              </a:avLst>
+            </a:prstGeom>
+            <a:solidFill>
+              <a:srgbClr val="FFFFFF"/>
+            </a:solidFill>
+            <a:ln w="11430">
+              <a:solidFill>
+                <a:srgbClr val="B8C7D6"/>
+              </a:solidFill>
+            </a:ln>
+          </p:spPr>
+        </p:sp>
+        <p:sp>
+          <p:nvSpPr>
+            <p:cNvPr id="28" name="Rectangle 28"/>
+            <p:cNvSpPr/>
+            <p:nvPr/>
+          </p:nvSpPr>
+          <p:spPr>
+            <a:xfrm>
+              <a:off x="647700" y="1438275"/>
+              <a:ext cx="6096000" cy="3905250"/>
+            </a:xfrm>
+            <a:prstGeom prst="roundRect">
+              <a:avLst>
+                <a:gd name="adj" fmla="val 488"/>
+              </a:avLst>
+            </a:prstGeom>
+            <a:solidFill>
+              <a:srgbClr val="F0F9FC"/>
+            </a:solidFill>
+            <a:ln w="9525">
+              <a:solidFill>
+                <a:srgbClr val="D4E2EE"/>
+              </a:solidFill>
+            </a:ln>
+          </p:spPr>
+        </p:sp>
+        <p:pic>
+          <p:nvPicPr>
+            <p:cNvPr id="29" name="Image 29"/>
+            <p:cNvPicPr>
+              <a:picLocks noChangeAspect="1"/>
+            </p:cNvPicPr>
+            <p:nvPr/>
+          </p:nvPicPr>
+          <p:blipFill>
+            <a:blip r:embed="rId2"/>
+            <a:stretch>
+              <a:fillRect/>
+            </a:stretch>
+          </p:blipFill>
+          <p:spPr>
+            <a:xfrm>
+              <a:off x="647700" y="1605643"/>
+              <a:ext cx="6096000" cy="3570514"/>
+            </a:xfrm>
+            <a:prstGeom prst="rect">
+              <a:avLst/>
+            </a:prstGeom>
+          </p:spPr>
+        </p:pic>
+        <p:sp>
+          <p:nvSpPr>
+            <p:cNvPr id="30" name="Line 30"/>
+            <p:cNvSpPr/>
+            <p:nvPr/>
+          </p:nvSpPr>
+          <p:spPr>
+            <a:xfrm>
+              <a:off x="723900" y="5534025"/>
+              <a:ext cx="5943600" cy="9525"/>
+            </a:xfrm>
+            <a:custGeom>
+              <a:avLst/>
+              <a:gdLst/>
+              <a:ahLst/>
+              <a:cxnLst/>
+              <a:rect l="l" t="t" r="r" b="b"/>
+              <a:pathLst>
+                <a:path w="5943600" h="9525">
+                  <a:moveTo>
+                    <a:pt x="0" y="0"/>
+                  </a:moveTo>
+                  <a:lnTo>
+                    <a:pt x="5943600" y="0"/>
+                  </a:lnTo>
+                </a:path>
+              </a:pathLst>
+            </a:custGeom>
+            <a:noFill/>
+            <a:ln w="9525">
+              <a:solidFill>
+                <a:srgbClr val="D4E2EE"/>
+              </a:solidFill>
+            </a:ln>
+          </p:spPr>
+        </p:sp>
+        <p:sp>
+          <p:nvSpPr>
+            <p:cNvPr id="31" name="TextBox 31"/>
+            <p:cNvSpPr txBox="1"/>
+            <p:nvPr/>
+          </p:nvSpPr>
+          <p:spPr>
+            <a:xfrm>
+              <a:off x="800100" y="5610225"/>
+              <a:ext cx="5791200" cy="457200"/>
+            </a:xfrm>
+            <a:prstGeom prst="rect">
+              <a:avLst/>
+            </a:prstGeom>
+            <a:noFill/>
+            <a:ln>
+              <a:noFill/>
+            </a:ln>
+          </p:spPr>
+          <p:txBody>
+            <a:bodyPr wrap="square" lIns="0" tIns="0" rIns="0" bIns="0" anchor="ctr" anchorCtr="0">
+              <a:normAutofit/>
+            </a:bodyPr>
+            <a:lstStyle/>
+            <a:p>
+              <a:pPr algn="ctr"/>
+              <a:r>
+                <a:rPr lang="zh-CN" sz="1350" dirty="0">
+                  <a:solidFill>
+                    <a:srgbClr val="52657A"/>
+                  </a:solidFill>
+                  <a:latin typeface="Arial"/>
+                  <a:ea typeface="Microsoft YaHei"/>
+                  <a:cs typeface="Arial"/>
+                </a:rPr>
+                <a:t>代码：workflow.py · dataagent/infra/runtime/workflow.py</a:t>
+              </a:r>
+            </a:p>
+          </p:txBody>
+        </p:sp>
+      </p:grpSp>
+    </p:spTree>
+  </p:cSld>
+  <p:clrMapOvr>
+    <a:masterClrMapping/>
+  </p:clrMapOvr>
+</p:sld>
+</file>
+
+<file path=ppt/slides/slide6.xml><?xml version="1.0" encoding="utf-8"?>
+<p:sld xmlns:a="http://schemas.openxmlformats.org/drawingml/2006/main" xmlns:r="http://schemas.openxmlformats.org/officeDocument/2006/relationships" xmlns:p="http://schemas.openxmlformats.org/presentationml/2006/main">
+  <p:cSld>
+    <p:spTree>
+      <p:nvGrpSpPr>
+        <p:cNvPr id="1" name=""/>
+        <p:cNvGrpSpPr/>
+        <p:nvPr/>
+      </p:nvGrpSpPr>
+      <p:grpSpPr>
+        <a:xfrm>
+          <a:off x="0" y="0"/>
+          <a:ext cx="0" cy="0"/>
+          <a:chOff x="0" y="0"/>
+          <a:chExt cx="0" cy="0"/>
+        </a:xfrm>
+      </p:grpSpPr>
+      <p:sp>
+        <p:nvSpPr>
+          <p:cNvPr id="2" name="Rectangle 2"/>
+          <p:cNvSpPr/>
+          <p:nvPr/>
+        </p:nvSpPr>
+        <p:spPr>
+          <a:xfrm>
+            <a:off x="0" y="0"/>
+            <a:ext cx="12192000" cy="6858000"/>
+          </a:xfrm>
+          <a:prstGeom prst="rect">
+            <a:avLst/>
+          </a:prstGeom>
+          <a:solidFill>
+            <a:srgbClr val="FFFFFF"/>
+          </a:solidFill>
+          <a:ln>
+            <a:noFill/>
+          </a:ln>
+        </p:spPr>
+      </p:sp>
+      <p:sp>
+        <p:nvSpPr>
+          <p:cNvPr id="3" name="Rectangle 3"/>
+          <p:cNvSpPr/>
+          <p:nvPr/>
+        </p:nvSpPr>
+        <p:spPr>
+          <a:xfrm>
+            <a:off x="0" y="0"/>
+            <a:ext cx="12192000" cy="666750"/>
+          </a:xfrm>
+          <a:prstGeom prst="rect">
+            <a:avLst/>
+          </a:prstGeom>
+          <a:solidFill>
+            <a:srgbClr val="0E7490"/>
+          </a:solidFill>
+          <a:ln>
+            <a:noFill/>
+          </a:ln>
+        </p:spPr>
+      </p:sp>
+      <p:sp>
+        <p:nvSpPr>
+          <p:cNvPr id="4" name="Rectangle 4"/>
+          <p:cNvSpPr/>
+          <p:nvPr/>
+        </p:nvSpPr>
+        <p:spPr>
+          <a:xfrm>
+            <a:off x="0" y="0"/>
+            <a:ext cx="57150" cy="666750"/>
+          </a:xfrm>
+          <a:prstGeom prst="rect">
+            <a:avLst/>
+          </a:prstGeom>
+          <a:solidFill>
+            <a:srgbClr val="CC0000"/>
+          </a:solidFill>
+          <a:ln>
+            <a:noFill/>
+          </a:ln>
+        </p:spPr>
+      </p:sp>
+      <p:sp>
+        <p:nvSpPr>
+          <p:cNvPr id="5" name="TextBox 5"/>
+          <p:cNvSpPr txBox="1"/>
+          <p:nvPr/>
+        </p:nvSpPr>
+        <p:spPr>
+          <a:xfrm>
+            <a:off x="381000" y="123825"/>
+            <a:ext cx="762000" cy="400050"/>
+          </a:xfrm>
+          <a:prstGeom prst="rect">
+            <a:avLst/>
+          </a:prstGeom>
+          <a:noFill/>
+          <a:ln>
+            <a:noFill/>
+          </a:ln>
+        </p:spPr>
+        <p:txBody>
+          <a:bodyPr wrap="none" lIns="0" tIns="0" rIns="0" bIns="0" anchor="ctr" anchorCtr="0">
+            <a:noAutofit/>
+          </a:bodyPr>
+          <a:lstStyle/>
+          <a:p>
+            <a:pPr algn="l"/>
+            <a:r>
+              <a:rPr lang="zh-CN" sz="1275" b="1" dirty="0">
+                <a:solidFill>
+                  <a:srgbClr val="9FD3FF"/>
+                </a:solidFill>
+                <a:latin typeface="Arial"/>
+                <a:ea typeface="Microsoft YaHei"/>
+                <a:cs typeface="Arial"/>
+              </a:rPr>
+              <a:t>15</a:t>
+            </a:r>
+          </a:p>
+        </p:txBody>
+      </p:sp>
+      <p:sp>
+        <p:nvSpPr>
+          <p:cNvPr id="6" name="TextBox 6"/>
+          <p:cNvSpPr txBox="1"/>
+          <p:nvPr/>
+        </p:nvSpPr>
+        <p:spPr>
+          <a:xfrm>
+            <a:off x="1257300" y="95250"/>
+            <a:ext cx="8096250" cy="457200"/>
+          </a:xfrm>
+          <a:prstGeom prst="rect">
+            <a:avLst/>
+          </a:prstGeom>
+          <a:noFill/>
+          <a:ln>
+            <a:noFill/>
+          </a:ln>
+        </p:spPr>
+        <p:txBody>
+          <a:bodyPr wrap="none" lIns="0" tIns="0" rIns="0" bIns="0" anchor="ctr" anchorCtr="0">
+            <a:noAutofit/>
+          </a:bodyPr>
+          <a:lstStyle/>
+          <a:p>
+            <a:pPr algn="l"/>
+            <a:r>
+              <a:rPr lang="zh-CN" sz="2100" b="1" dirty="0">
+                <a:solidFill>
+                  <a:srgbClr val="FFFFFF"/>
+                </a:solidFill>
+                <a:latin typeface="Arial"/>
+                <a:ea typeface="Microsoft YaHei"/>
+                <a:cs typeface="Arial"/>
+              </a:rPr>
+              <a:t>关键证据与结论</a:t>
+            </a:r>
+          </a:p>
+        </p:txBody>
+      </p:sp>
+      <p:sp>
+        <p:nvSpPr>
+          <p:cNvPr id="7" name="TextBox 7"/>
+          <p:cNvSpPr txBox="1"/>
+          <p:nvPr/>
+        </p:nvSpPr>
+        <p:spPr>
+          <a:xfrm>
+            <a:off x="10001250" y="76200"/>
+            <a:ext cx="1619250" cy="514350"/>
+          </a:xfrm>
+          <a:prstGeom prst="rect">
+            <a:avLst/>
+          </a:prstGeom>
+          <a:noFill/>
+          <a:ln>
+            <a:noFill/>
+          </a:ln>
+        </p:spPr>
+        <p:txBody>
+          <a:bodyPr wrap="square" lIns="0" tIns="0" rIns="0" bIns="0" anchor="ctr" anchorCtr="0">
+            <a:normAutofit/>
+          </a:bodyPr>
+          <a:lstStyle/>
+          <a:p>
+            <a:pPr algn="ctr"/>
+            <a:r>
+              <a:rPr lang="zh-CN" sz="1350" b="1" dirty="0">
+                <a:solidFill>
+                  <a:srgbClr val="FFFFFF"/>
+                </a:solidFill>
+                <a:latin typeface="Arial"/>
+                <a:ea typeface="Microsoft YaHei"/>
+                <a:cs typeface="Arial"/>
+              </a:rPr>
+              <a:t>DataAgent</a:t>
+            </a:r>
+          </a:p>
+        </p:txBody>
+      </p:sp>
+      <p:sp>
+        <p:nvSpPr>
+          <p:cNvPr id="8" name="Rectangle 8"/>
+          <p:cNvSpPr/>
+          <p:nvPr/>
+        </p:nvSpPr>
+        <p:spPr>
+          <a:xfrm>
+            <a:off x="0" y="666750"/>
+            <a:ext cx="12192000" cy="476250"/>
+          </a:xfrm>
+          <a:prstGeom prst="rect">
+            <a:avLst/>
+          </a:prstGeom>
+          <a:solidFill>
+            <a:srgbClr val="E8F4FC"/>
+          </a:solidFill>
+          <a:ln>
+            <a:noFill/>
+          </a:ln>
+        </p:spPr>
+      </p:sp>
+      <p:sp>
+        <p:nvSpPr>
+          <p:cNvPr id="9" name="Rectangle 9"/>
+          <p:cNvSpPr/>
+          <p:nvPr/>
+        </p:nvSpPr>
+        <p:spPr>
+          <a:xfrm>
+            <a:off x="0" y="666750"/>
+            <a:ext cx="57150" cy="476250"/>
+          </a:xfrm>
+          <a:prstGeom prst="rect">
+            <a:avLst/>
+          </a:prstGeom>
+          <a:solidFill>
+            <a:srgbClr val="06B6D4"/>
+          </a:solidFill>
+          <a:ln>
+            <a:noFill/>
+          </a:ln>
+        </p:spPr>
+      </p:sp>
+      <p:sp>
+        <p:nvSpPr>
+          <p:cNvPr id="10" name="TextBox 10"/>
+          <p:cNvSpPr txBox="1"/>
+          <p:nvPr/>
+        </p:nvSpPr>
+        <p:spPr>
+          <a:xfrm>
+            <a:off x="381000" y="714375"/>
+            <a:ext cx="10001250" cy="381000"/>
+          </a:xfrm>
+          <a:prstGeom prst="rect">
+            <a:avLst/>
+          </a:prstGeom>
+          <a:noFill/>
+          <a:ln>
+            <a:noFill/>
+          </a:ln>
+        </p:spPr>
+        <p:txBody>
+          <a:bodyPr wrap="square" lIns="0" tIns="0" rIns="0" bIns="0" anchor="ctr" anchorCtr="0">
+            <a:normAutofit/>
+          </a:bodyPr>
+          <a:lstStyle/>
+          <a:p>
+            <a:pPr algn="l"/>
+            <a:r>
+              <a:rPr lang="zh-CN" sz="1350" dirty="0">
+                <a:solidFill>
+                  <a:srgbClr val="26384A"/>
+                </a:solidFill>
+                <a:latin typeface="Arial"/>
+                <a:ea typeface="Microsoft YaHei"/>
+                <a:cs typeface="Arial"/>
+              </a:rPr>
+              <a:t>用证据支撑工程判断</a:t>
+            </a:r>
+          </a:p>
+        </p:txBody>
+      </p:sp>
+      <p:sp>
+        <p:nvSpPr>
+          <p:cNvPr id="11" name="Line 11"/>
+          <p:cNvSpPr/>
+          <p:nvPr/>
+        </p:nvSpPr>
+        <p:spPr>
+          <a:xfrm>
+            <a:off x="381000" y="6334125"/>
+            <a:ext cx="11430000" cy="9525"/>
+          </a:xfrm>
+          <a:custGeom>
+            <a:avLst/>
+            <a:gdLst/>
+            <a:ahLst/>
+            <a:cxnLst/>
+            <a:rect l="l" t="t" r="r" b="b"/>
+            <a:pathLst>
+              <a:path w="11430000" h="9525">
+                <a:moveTo>
+                  <a:pt x="0" y="0"/>
+                </a:moveTo>
+                <a:lnTo>
+                  <a:pt x="11430000" y="0"/>
+                </a:lnTo>
+              </a:path>
+            </a:pathLst>
+          </a:custGeom>
+          <a:noFill/>
+          <a:ln w="9525">
+            <a:solidFill>
+              <a:srgbClr val="E8F4FC"/>
+            </a:solidFill>
+          </a:ln>
+        </p:spPr>
+      </p:sp>
+      <p:sp>
+        <p:nvSpPr>
+          <p:cNvPr id="12" name="TextBox 12"/>
+          <p:cNvSpPr txBox="1"/>
+          <p:nvPr/>
+        </p:nvSpPr>
+        <p:spPr>
+          <a:xfrm>
+            <a:off x="381000" y="6477000"/>
+            <a:ext cx="4953000" cy="247650"/>
+          </a:xfrm>
+          <a:prstGeom prst="rect">
+            <a:avLst/>
+          </a:prstGeom>
+          <a:noFill/>
+          <a:ln>
+            <a:noFill/>
+          </a:ln>
+        </p:spPr>
+        <p:txBody>
+          <a:bodyPr wrap="square" lIns="0" tIns="0" rIns="0" bIns="0" anchor="ctr" anchorCtr="0">
+            <a:normAutofit/>
+          </a:bodyPr>
+          <a:lstStyle/>
+          <a:p>
+            <a:pPr algn="l"/>
+            <a:r>
+              <a:rPr lang="zh-CN" sz="900" dirty="0">
+                <a:solidFill>
+                  <a:srgbClr val="6B7C8F"/>
+                </a:solidFill>
+                <a:latin typeface="Arial"/>
+                <a:ea typeface="Microsoft YaHei"/>
+                <a:cs typeface="Arial"/>
+              </a:rPr>
+              <a:t>课程第15讲</a:t>
+            </a:r>
+          </a:p>
+        </p:txBody>
+      </p:sp>
+      <p:sp>
+        <p:nvSpPr>
+          <p:cNvPr id="13" name="TextBox 13"/>
+          <p:cNvSpPr txBox="1"/>
+          <p:nvPr/>
+        </p:nvSpPr>
+        <p:spPr>
+          <a:xfrm>
+            <a:off x="4381500" y="6477000"/>
+            <a:ext cx="3429000" cy="247650"/>
+          </a:xfrm>
+          <a:prstGeom prst="rect">
+            <a:avLst/>
+          </a:prstGeom>
+          <a:noFill/>
+          <a:ln>
+            <a:noFill/>
+          </a:ln>
+        </p:spPr>
+        <p:txBody>
+          <a:bodyPr wrap="square" lIns="0" tIns="0" rIns="0" bIns="0" anchor="ctr" anchorCtr="0">
+            <a:normAutofit/>
+          </a:bodyPr>
+          <a:lstStyle/>
+          <a:p>
+            <a:pPr algn="ctr"/>
+            <a:r>
+              <a:rPr lang="zh-CN" sz="900" dirty="0">
+                <a:solidFill>
+                  <a:srgbClr val="6B7C8F"/>
+                </a:solidFill>
+                <a:latin typeface="Arial"/>
+                <a:ea typeface="Microsoft YaHei"/>
+                <a:cs typeface="Arial"/>
+              </a:rPr>
+              <a:t>Agent Runtime</a:t>
+            </a:r>
+          </a:p>
+        </p:txBody>
+      </p:sp>
+      <p:sp>
+        <p:nvSpPr>
+          <p:cNvPr id="14" name="TextBox 14"/>
+          <p:cNvSpPr txBox="1"/>
+          <p:nvPr/>
+        </p:nvSpPr>
+        <p:spPr>
+          <a:xfrm>
+            <a:off x="10763250" y="6457950"/>
+            <a:ext cx="857250" cy="266700"/>
+          </a:xfrm>
+          <a:prstGeom prst="rect">
+            <a:avLst/>
+          </a:prstGeom>
+          <a:noFill/>
+          <a:ln>
+            <a:noFill/>
+          </a:ln>
+        </p:spPr>
+        <p:txBody>
+          <a:bodyPr wrap="square" lIns="0" tIns="0" rIns="0" bIns="0" anchor="ctr" anchorCtr="0">
+            <a:normAutofit/>
+          </a:bodyPr>
+          <a:lstStyle/>
+          <a:p>
+            <a:pPr algn="ctr"/>
+            <a:r>
+              <a:rPr lang="zh-CN" sz="1050" dirty="0">
+                <a:solidFill>
+                  <a:srgbClr val="52657A"/>
+                </a:solidFill>
+                <a:latin typeface="Arial"/>
+                <a:ea typeface="Microsoft YaHei"/>
+                <a:cs typeface="Arial"/>
+              </a:rPr>
+              <a:t>06</a:t>
             </a:r>
           </a:p>
         </p:txBody>
@@ -6746,7 +7783,7 @@
               </a:avLst>
             </a:prstGeom>
             <a:solidFill>
-              <a:srgbClr val="0066CC"/>
+              <a:srgbClr val="06B6D4"/>
             </a:solidFill>
             <a:ln>
               <a:noFill/>
@@ -6782,7 +7819,7 @@
               <a:r>
                 <a:rPr lang="zh-CN" sz="1650" b="1" dirty="0">
                   <a:solidFill>
-                    <a:srgbClr val="0066CC"/>
+                    <a:srgbClr val="06B6D4"/>
                   </a:solidFill>
                   <a:latin typeface="Arial"/>
                   <a:ea typeface="Microsoft YaHei"/>
@@ -6822,7 +7859,7 @@
               <a:r>
                 <a:rPr lang="zh-CN" sz="1575" b="1" dirty="0">
                   <a:solidFill>
-                    <a:srgbClr val="003366"/>
+                    <a:srgbClr val="0E7490"/>
                   </a:solidFill>
                   <a:latin typeface="Arial"/>
                   <a:ea typeface="Microsoft YaHei"/>
@@ -6967,7 +8004,7 @@
               </a:avLst>
             </a:prstGeom>
             <a:solidFill>
-              <a:srgbClr val="0066CC"/>
+              <a:srgbClr val="06B6D4"/>
             </a:solidFill>
             <a:ln>
               <a:noFill/>
@@ -7003,7 +8040,7 @@
               <a:r>
                 <a:rPr lang="zh-CN" sz="1650" b="1" dirty="0">
                   <a:solidFill>
-                    <a:srgbClr val="0066CC"/>
+                    <a:srgbClr val="06B6D4"/>
                   </a:solidFill>
                   <a:latin typeface="Arial"/>
                   <a:ea typeface="Microsoft YaHei"/>
@@ -7043,7 +8080,7 @@
               <a:r>
                 <a:rPr lang="zh-CN" sz="1575" b="1" dirty="0">
                   <a:solidFill>
-                    <a:srgbClr val="003366"/>
+                    <a:srgbClr val="0E7490"/>
                   </a:solidFill>
                   <a:latin typeface="Arial"/>
                   <a:ea typeface="Microsoft YaHei"/>
@@ -7188,7 +8225,7 @@
               </a:avLst>
             </a:prstGeom>
             <a:solidFill>
-              <a:srgbClr val="0066CC"/>
+              <a:srgbClr val="06B6D4"/>
             </a:solidFill>
             <a:ln>
               <a:noFill/>
@@ -7224,7 +8261,7 @@
               <a:r>
                 <a:rPr lang="zh-CN" sz="1650" b="1" dirty="0">
                   <a:solidFill>
-                    <a:srgbClr val="0066CC"/>
+                    <a:srgbClr val="06B6D4"/>
                   </a:solidFill>
                   <a:latin typeface="Arial"/>
                   <a:ea typeface="Microsoft YaHei"/>
@@ -7264,7 +8301,7 @@
               <a:r>
                 <a:rPr lang="zh-CN" sz="1575" b="1" dirty="0">
                   <a:solidFill>
-                    <a:srgbClr val="003366"/>
+                    <a:srgbClr val="0E7490"/>
                   </a:solidFill>
                   <a:latin typeface="Arial"/>
                   <a:ea typeface="Microsoft YaHei"/>
@@ -7346,7 +8383,7 @@
                   <a:ea typeface="Microsoft YaHei"/>
                   <a:cs typeface="Arial"/>
                 </a:rPr>
-                <a:t>dataagent/infra/</a:t>
+                <a:t>workflow.py</a:t>
               </a:r>
             </a:p>
           </p:txBody>
@@ -7383,7 +8420,7 @@
               </a:avLst>
             </a:prstGeom>
             <a:solidFill>
-              <a:srgbClr val="003366"/>
+              <a:srgbClr val="0E7490"/>
             </a:solidFill>
             <a:ln>
               <a:noFill/>
@@ -7463,7 +8500,7 @@
 </p:sld>
 </file>
 
-<file path=ppt/slides/slide5.xml><?xml version="1.0" encoding="utf-8"?>
+<file path=ppt/slides/slide7.xml><?xml version="1.0" encoding="utf-8"?>
 <p:sld xmlns:a="http://schemas.openxmlformats.org/drawingml/2006/main" xmlns:r="http://schemas.openxmlformats.org/officeDocument/2006/relationships" xmlns:p="http://schemas.openxmlformats.org/presentationml/2006/main">
   <p:cSld>
     <p:spTree>
@@ -7517,7 +8554,7 @@
             <a:avLst/>
           </a:prstGeom>
           <a:solidFill>
-            <a:srgbClr val="003366"/>
+            <a:srgbClr val="0E7490"/>
           </a:solidFill>
           <a:ln>
             <a:noFill/>
@@ -7615,7 +8652,7 @@
             <a:r>
               <a:rPr lang="zh-CN" sz="4200" b="1" dirty="0">
                 <a:solidFill>
-                  <a:srgbClr val="003366"/>
+                  <a:srgbClr val="0E7490"/>
                 </a:solidFill>
                 <a:latin typeface="Arial"/>
                 <a:ea typeface="Microsoft YaHei"/>
@@ -7661,7 +8698,7 @@
                 <a:ea typeface="Microsoft YaHei"/>
                 <a:cs typeface="Arial"/>
               </a:rPr>
-              <a:t>15 Agent Runtime 的混合架构选型与设计：取长</a:t>
+              <a:t>Agent Runtime 的混合架构选型与设计</a:t>
             </a:r>
           </a:p>
         </p:txBody>
@@ -7697,7 +8734,7 @@
           <a:noFill/>
           <a:ln w="19050">
             <a:solidFill>
-              <a:srgbClr val="0066CC"/>
+              <a:srgbClr val="06B6D4"/>
             </a:solidFill>
           </a:ln>
         </p:spPr>
@@ -7741,7 +8778,7 @@
             </a:avLst>
           </a:prstGeom>
           <a:solidFill>
-            <a:srgbClr val="F5F7FA"/>
+            <a:srgbClr val="F0F9FC"/>
           </a:solidFill>
           <a:ln>
             <a:noFill/>
@@ -7823,7 +8860,7 @@
                 <a:ea typeface="Microsoft YaHei"/>
                 <a:cs typeface="Arial"/>
               </a:rPr>
-              <a:t>第15讲 · 第五篇（Agent</a:t>
+              <a:t>第15讲 · Agent Runtime</a:t>
             </a:r>
           </a:p>
         </p:txBody>
@@ -7883,7 +8920,7 @@
             <a:avLst/>
           </a:prstGeom>
           <a:solidFill>
-            <a:srgbClr val="F5F7FA"/>
+            <a:srgbClr val="F0F9FC"/>
           </a:solidFill>
           <a:ln>
             <a:noFill/>
@@ -7965,7 +9002,7 @@
                 <a:ea typeface="Microsoft YaHei"/>
                 <a:cs typeface="Arial"/>
               </a:rPr>
-              <a:t>5</a:t>
+              <a:t>7</a:t>
             </a:r>
           </a:p>
         </p:txBody>
